--- a/slides for class/JS_Week2_Slides.pptx
+++ b/slides for class/JS_Week2_Slides.pptx
@@ -2,30 +2,30 @@
 <file path=ppt/presentation.xml><?xml version="1.0" encoding="utf-8"?>
 <p:presentation xmlns:a="http://schemas.openxmlformats.org/drawingml/2006/main" xmlns:r="http://schemas.openxmlformats.org/officeDocument/2006/relationships" xmlns:p="http://schemas.openxmlformats.org/presentationml/2006/main" saveSubsetFonts="1" autoCompressPictures="0">
   <p:sldMasterIdLst>
-    <p:sldMasterId id="2147483648" r:id="rId1"/>
+    <p:sldMasterId id="2147483660" r:id="rId1"/>
   </p:sldMasterIdLst>
   <p:sldIdLst>
-    <p:sldId id="256" r:id="rId7"/>
-    <p:sldId id="257" r:id="rId8"/>
-    <p:sldId id="258" r:id="rId9"/>
-    <p:sldId id="259" r:id="rId10"/>
-    <p:sldId id="260" r:id="rId11"/>
-    <p:sldId id="261" r:id="rId12"/>
-    <p:sldId id="262" r:id="rId13"/>
-    <p:sldId id="263" r:id="rId14"/>
-    <p:sldId id="264" r:id="rId15"/>
-    <p:sldId id="265" r:id="rId16"/>
-    <p:sldId id="266" r:id="rId17"/>
-    <p:sldId id="267" r:id="rId18"/>
-    <p:sldId id="268" r:id="rId19"/>
-    <p:sldId id="269" r:id="rId20"/>
-    <p:sldId id="270" r:id="rId21"/>
-    <p:sldId id="271" r:id="rId22"/>
-    <p:sldId id="272" r:id="rId23"/>
-    <p:sldId id="273" r:id="rId24"/>
-    <p:sldId id="274" r:id="rId25"/>
-    <p:sldId id="275" r:id="rId26"/>
-    <p:sldId id="276" r:id="rId27"/>
+    <p:sldId id="256" r:id="rId2"/>
+    <p:sldId id="257" r:id="rId3"/>
+    <p:sldId id="258" r:id="rId4"/>
+    <p:sldId id="259" r:id="rId5"/>
+    <p:sldId id="260" r:id="rId6"/>
+    <p:sldId id="261" r:id="rId7"/>
+    <p:sldId id="262" r:id="rId8"/>
+    <p:sldId id="263" r:id="rId9"/>
+    <p:sldId id="264" r:id="rId10"/>
+    <p:sldId id="265" r:id="rId11"/>
+    <p:sldId id="266" r:id="rId12"/>
+    <p:sldId id="267" r:id="rId13"/>
+    <p:sldId id="268" r:id="rId14"/>
+    <p:sldId id="269" r:id="rId15"/>
+    <p:sldId id="270" r:id="rId16"/>
+    <p:sldId id="271" r:id="rId17"/>
+    <p:sldId id="272" r:id="rId18"/>
+    <p:sldId id="273" r:id="rId19"/>
+    <p:sldId id="274" r:id="rId20"/>
+    <p:sldId id="275" r:id="rId21"/>
+    <p:sldId id="276" r:id="rId22"/>
   </p:sldIdLst>
   <p:sldSz cx="9144000" cy="6858000" type="screen4x3"/>
   <p:notesSz cx="6858000" cy="9144000"/>
@@ -124,6 +124,22 @@
       </a:defRPr>
     </a:lvl9pPr>
   </p:defaultTextStyle>
+  <p:extLst>
+    <p:ext uri="{EFAFB233-063F-42B5-8137-9DF3F51BA10A}">
+      <p15:sldGuideLst xmlns:p15="http://schemas.microsoft.com/office/powerpoint/2012/main">
+        <p15:guide id="1" orient="horz" pos="2160">
+          <p15:clr>
+            <a:srgbClr val="A4A3A4"/>
+          </p15:clr>
+        </p15:guide>
+        <p15:guide id="2" pos="2880">
+          <p15:clr>
+            <a:srgbClr val="A4A3A4"/>
+          </p15:clr>
+        </p15:guide>
+      </p15:sldGuideLst>
+    </p:ext>
+  </p:extLst>
 </p:presentation>
 </file>
 
@@ -146,29 +162,113 @@
       </p:grpSpPr>
       <p:sp>
         <p:nvSpPr>
-          <p:cNvPr id="2" name="Title 1"/>
-          <p:cNvSpPr>
-            <a:spLocks noGrp="1"/>
-          </p:cNvSpPr>
-          <p:nvPr>
-            <p:ph type="ctrTitle"/>
-          </p:nvPr>
+          <p:cNvPr id="10" name="Rectangle 9"/>
+          <p:cNvSpPr/>
+          <p:nvPr/>
         </p:nvSpPr>
         <p:spPr>
           <a:xfrm>
-            <a:off x="685800" y="2130425"/>
-            <a:ext cx="7772400" cy="1470025"/>
+            <a:off x="1007534" y="0"/>
+            <a:ext cx="5898825" cy="6858000"/>
+          </a:xfrm>
+          <a:prstGeom prst="rect">
+            <a:avLst/>
+          </a:prstGeom>
+          <a:solidFill>
+            <a:schemeClr val="bg2">
+              <a:alpha val="92000"/>
+            </a:schemeClr>
+          </a:solidFill>
+          <a:ln>
+            <a:noFill/>
+          </a:ln>
+        </p:spPr>
+        <p:style>
+          <a:lnRef idx="2">
+            <a:schemeClr val="accent1">
+              <a:shade val="50000"/>
+            </a:schemeClr>
+          </a:lnRef>
+          <a:fillRef idx="1">
+            <a:schemeClr val="accent1"/>
+          </a:fillRef>
+          <a:effectRef idx="0">
+            <a:schemeClr val="accent1"/>
+          </a:effectRef>
+          <a:fontRef idx="minor">
+            <a:schemeClr val="lt1"/>
+          </a:fontRef>
+        </p:style>
+      </p:sp>
+      <p:sp>
+        <p:nvSpPr>
+          <p:cNvPr id="11" name="Rectangle 10"/>
+          <p:cNvSpPr/>
+          <p:nvPr/>
+        </p:nvSpPr>
+        <p:spPr>
+          <a:xfrm>
+            <a:off x="6906359" y="0"/>
+            <a:ext cx="27432" cy="6858000"/>
+          </a:xfrm>
+          <a:prstGeom prst="rect">
+            <a:avLst/>
+          </a:prstGeom>
+          <a:solidFill>
+            <a:schemeClr val="accent6"/>
+          </a:solidFill>
+          <a:ln>
+            <a:noFill/>
+          </a:ln>
+        </p:spPr>
+        <p:style>
+          <a:lnRef idx="2">
+            <a:schemeClr val="accent1">
+              <a:shade val="50000"/>
+            </a:schemeClr>
+          </a:lnRef>
+          <a:fillRef idx="1">
+            <a:schemeClr val="accent1"/>
+          </a:fillRef>
+          <a:effectRef idx="0">
+            <a:schemeClr val="accent1"/>
+          </a:effectRef>
+          <a:fontRef idx="minor">
+            <a:schemeClr val="lt1"/>
+          </a:fontRef>
+        </p:style>
+      </p:sp>
+      <p:sp>
+        <p:nvSpPr>
+          <p:cNvPr id="2" name="Title 1"/>
+          <p:cNvSpPr>
+            <a:spLocks noGrp="1"/>
+          </p:cNvSpPr>
+          <p:nvPr>
+            <p:ph type="ctrTitle"/>
+          </p:nvPr>
+        </p:nvSpPr>
+        <p:spPr>
+          <a:xfrm>
+            <a:off x="1958856" y="3428999"/>
+            <a:ext cx="4138550" cy="2268559"/>
           </a:xfrm>
         </p:spPr>
         <p:txBody>
-          <a:bodyPr/>
-          <a:lstStyle/>
-          <a:p>
-            <a:r>
-              <a:rPr lang="en-US" smtClean="0"/>
+          <a:bodyPr anchor="t">
+            <a:normAutofit/>
+          </a:bodyPr>
+          <a:lstStyle>
+            <a:lvl1pPr algn="r">
+              <a:defRPr sz="4200"/>
+            </a:lvl1pPr>
+          </a:lstStyle>
+          <a:p>
+            <a:r>
+              <a:rPr lang="en-US"/>
               <a:t>Click to edit Master title style</a:t>
             </a:r>
-            <a:endParaRPr lang="en-US"/>
+            <a:endParaRPr lang="en-US" dirty="0"/>
           </a:p>
         </p:txBody>
       </p:sp>
@@ -184,110 +284,62 @@
         </p:nvSpPr>
         <p:spPr>
           <a:xfrm>
-            <a:off x="1371600" y="3886200"/>
-            <a:ext cx="6400800" cy="1752600"/>
+            <a:off x="2131292" y="2268787"/>
+            <a:ext cx="3966114" cy="1160213"/>
           </a:xfrm>
         </p:spPr>
         <p:txBody>
-          <a:bodyPr/>
+          <a:bodyPr tIns="0" anchor="b">
+            <a:normAutofit/>
+          </a:bodyPr>
           <a:lstStyle>
-            <a:lvl1pPr marL="0" indent="0" algn="ctr">
+            <a:lvl1pPr marL="0" indent="0" algn="r">
               <a:buNone/>
-              <a:defRPr>
+              <a:defRPr sz="1600" b="0">
                 <a:solidFill>
-                  <a:schemeClr val="tx1">
-                    <a:tint val="75000"/>
-                  </a:schemeClr>
+                  <a:schemeClr val="tx1"/>
                 </a:solidFill>
               </a:defRPr>
             </a:lvl1pPr>
-            <a:lvl2pPr marL="457200" indent="0" algn="ctr">
+            <a:lvl2pPr marL="342900" indent="0" algn="ctr">
               <a:buNone/>
-              <a:defRPr>
-                <a:solidFill>
-                  <a:schemeClr val="tx1">
-                    <a:tint val="75000"/>
-                  </a:schemeClr>
-                </a:solidFill>
-              </a:defRPr>
+              <a:defRPr sz="1500"/>
             </a:lvl2pPr>
-            <a:lvl3pPr marL="914400" indent="0" algn="ctr">
+            <a:lvl3pPr marL="685800" indent="0" algn="ctr">
               <a:buNone/>
-              <a:defRPr>
-                <a:solidFill>
-                  <a:schemeClr val="tx1">
-                    <a:tint val="75000"/>
-                  </a:schemeClr>
-                </a:solidFill>
-              </a:defRPr>
+              <a:defRPr sz="1350"/>
             </a:lvl3pPr>
-            <a:lvl4pPr marL="1371600" indent="0" algn="ctr">
+            <a:lvl4pPr marL="1028700" indent="0" algn="ctr">
               <a:buNone/>
-              <a:defRPr>
-                <a:solidFill>
-                  <a:schemeClr val="tx1">
-                    <a:tint val="75000"/>
-                  </a:schemeClr>
-                </a:solidFill>
-              </a:defRPr>
+              <a:defRPr sz="1200"/>
             </a:lvl4pPr>
-            <a:lvl5pPr marL="1828800" indent="0" algn="ctr">
+            <a:lvl5pPr marL="1371600" indent="0" algn="ctr">
               <a:buNone/>
-              <a:defRPr>
-                <a:solidFill>
-                  <a:schemeClr val="tx1">
-                    <a:tint val="75000"/>
-                  </a:schemeClr>
-                </a:solidFill>
-              </a:defRPr>
+              <a:defRPr sz="1200"/>
             </a:lvl5pPr>
-            <a:lvl6pPr marL="2286000" indent="0" algn="ctr">
+            <a:lvl6pPr marL="1714500" indent="0" algn="ctr">
               <a:buNone/>
-              <a:defRPr>
-                <a:solidFill>
-                  <a:schemeClr val="tx1">
-                    <a:tint val="75000"/>
-                  </a:schemeClr>
-                </a:solidFill>
-              </a:defRPr>
+              <a:defRPr sz="1200"/>
             </a:lvl6pPr>
-            <a:lvl7pPr marL="2743200" indent="0" algn="ctr">
+            <a:lvl7pPr marL="2057400" indent="0" algn="ctr">
               <a:buNone/>
-              <a:defRPr>
-                <a:solidFill>
-                  <a:schemeClr val="tx1">
-                    <a:tint val="75000"/>
-                  </a:schemeClr>
-                </a:solidFill>
-              </a:defRPr>
+              <a:defRPr sz="1200"/>
             </a:lvl7pPr>
-            <a:lvl8pPr marL="3200400" indent="0" algn="ctr">
+            <a:lvl8pPr marL="2400300" indent="0" algn="ctr">
               <a:buNone/>
-              <a:defRPr>
-                <a:solidFill>
-                  <a:schemeClr val="tx1">
-                    <a:tint val="75000"/>
-                  </a:schemeClr>
-                </a:solidFill>
-              </a:defRPr>
+              <a:defRPr sz="1200"/>
             </a:lvl8pPr>
-            <a:lvl9pPr marL="3657600" indent="0" algn="ctr">
+            <a:lvl9pPr marL="2743200" indent="0" algn="ctr">
               <a:buNone/>
-              <a:defRPr>
-                <a:solidFill>
-                  <a:schemeClr val="tx1">
-                    <a:tint val="75000"/>
-                  </a:schemeClr>
-                </a:solidFill>
-              </a:defRPr>
+              <a:defRPr sz="1200"/>
             </a:lvl9pPr>
           </a:lstStyle>
           <a:p>
             <a:r>
-              <a:rPr lang="en-US" smtClean="0"/>
+              <a:rPr lang="en-US"/>
               <a:t>Click to edit Master subtitle style</a:t>
             </a:r>
-            <a:endParaRPr lang="en-US"/>
+            <a:endParaRPr lang="en-US" dirty="0"/>
           </a:p>
         </p:txBody>
       </p:sp>
@@ -308,7 +360,7 @@
           <a:p>
             <a:fld id="{5BCAD085-E8A6-8845-BD4E-CB4CCA059FC4}" type="datetimeFigureOut">
               <a:rPr lang="en-US" smtClean="0"/>
-              <a:t>1/27/13</a:t>
+              <a:t>9/26/25</a:t>
             </a:fld>
             <a:endParaRPr lang="en-US"/>
           </a:p>
@@ -345,7 +397,7 @@
         </p:nvSpPr>
         <p:spPr/>
         <p:txBody>
-          <a:bodyPr/>
+          <a:bodyPr rIns="45720"/>
           <a:lstStyle/>
           <a:p>
             <a:fld id="{C1FF6DA9-008F-8B48-92A6-B652298478BF}" type="slidenum">
@@ -356,10 +408,51 @@
           </a:p>
         </p:txBody>
       </p:sp>
+      <p:sp>
+        <p:nvSpPr>
+          <p:cNvPr id="24" name="TextBox 23"/>
+          <p:cNvSpPr txBox="1"/>
+          <p:nvPr/>
+        </p:nvSpPr>
+        <p:spPr>
+          <a:xfrm>
+            <a:off x="1641440" y="3262168"/>
+            <a:ext cx="311727" cy="430887"/>
+          </a:xfrm>
+          <a:prstGeom prst="rect">
+            <a:avLst/>
+          </a:prstGeom>
+          <a:noFill/>
+        </p:spPr>
+        <p:txBody>
+          <a:bodyPr wrap="square" rtlCol="0">
+            <a:spAutoFit/>
+          </a:bodyPr>
+          <a:lstStyle/>
+          <a:p>
+            <a:pPr algn="r"/>
+            <a:r>
+              <a:rPr lang="en-US" sz="2200" dirty="0">
+                <a:solidFill>
+                  <a:schemeClr val="accent6"/>
+                </a:solidFill>
+                <a:latin typeface="Wingdings 3" panose="05040102010807070707" pitchFamily="18" charset="2"/>
+              </a:rPr>
+              <a:t>z</a:t>
+            </a:r>
+            <a:endParaRPr lang="en-US" sz="2200" dirty="0">
+              <a:solidFill>
+                <a:schemeClr val="accent6"/>
+              </a:solidFill>
+              <a:latin typeface="MS Shell Dlg 2" panose="020B0604030504040204" pitchFamily="34" charset="0"/>
+            </a:endParaRPr>
+          </a:p>
+        </p:txBody>
+      </p:sp>
     </p:spTree>
     <p:extLst>
       <p:ext uri="{BB962C8B-B14F-4D97-AF65-F5344CB8AC3E}">
-        <p14:creationId xmlns:p14="http://schemas.microsoft.com/office/powerpoint/2010/main" val="3168075583"/>
+        <p14:creationId xmlns:p14="http://schemas.microsoft.com/office/powerpoint/2010/main" val="3407124981"/>
       </p:ext>
     </p:extLst>
   </p:cSld>
@@ -388,6 +481,125 @@
       </p:grpSpPr>
       <p:sp>
         <p:nvSpPr>
+          <p:cNvPr id="10" name="Rectangle 9"/>
+          <p:cNvSpPr/>
+          <p:nvPr/>
+        </p:nvSpPr>
+        <p:spPr>
+          <a:xfrm>
+            <a:off x="1007534" y="0"/>
+            <a:ext cx="7315560" cy="6858000"/>
+          </a:xfrm>
+          <a:prstGeom prst="rect">
+            <a:avLst/>
+          </a:prstGeom>
+          <a:solidFill>
+            <a:schemeClr val="bg2">
+              <a:alpha val="92000"/>
+            </a:schemeClr>
+          </a:solidFill>
+          <a:ln>
+            <a:noFill/>
+          </a:ln>
+        </p:spPr>
+        <p:style>
+          <a:lnRef idx="2">
+            <a:schemeClr val="accent1">
+              <a:shade val="50000"/>
+            </a:schemeClr>
+          </a:lnRef>
+          <a:fillRef idx="1">
+            <a:schemeClr val="accent1"/>
+          </a:fillRef>
+          <a:effectRef idx="0">
+            <a:schemeClr val="accent1"/>
+          </a:effectRef>
+          <a:fontRef idx="minor">
+            <a:schemeClr val="lt1"/>
+          </a:fontRef>
+        </p:style>
+      </p:sp>
+      <p:sp>
+        <p:nvSpPr>
+          <p:cNvPr id="11" name="Rectangle 10"/>
+          <p:cNvSpPr/>
+          <p:nvPr/>
+        </p:nvSpPr>
+        <p:spPr>
+          <a:xfrm>
+            <a:off x="8321168" y="0"/>
+            <a:ext cx="27432" cy="6858000"/>
+          </a:xfrm>
+          <a:prstGeom prst="rect">
+            <a:avLst/>
+          </a:prstGeom>
+          <a:solidFill>
+            <a:schemeClr val="accent6"/>
+          </a:solidFill>
+          <a:ln>
+            <a:noFill/>
+          </a:ln>
+        </p:spPr>
+        <p:style>
+          <a:lnRef idx="2">
+            <a:schemeClr val="accent1">
+              <a:shade val="50000"/>
+            </a:schemeClr>
+          </a:lnRef>
+          <a:fillRef idx="1">
+            <a:schemeClr val="accent1"/>
+          </a:fillRef>
+          <a:effectRef idx="0">
+            <a:schemeClr val="accent1"/>
+          </a:effectRef>
+          <a:fontRef idx="minor">
+            <a:schemeClr val="lt1"/>
+          </a:fontRef>
+        </p:style>
+      </p:sp>
+      <p:sp>
+        <p:nvSpPr>
+          <p:cNvPr id="17" name="TextBox 16"/>
+          <p:cNvSpPr txBox="1"/>
+          <p:nvPr/>
+        </p:nvSpPr>
+        <p:spPr>
+          <a:xfrm>
+            <a:off x="1651862" y="636541"/>
+            <a:ext cx="311727" cy="338554"/>
+          </a:xfrm>
+          <a:prstGeom prst="rect">
+            <a:avLst/>
+          </a:prstGeom>
+          <a:noFill/>
+        </p:spPr>
+        <p:txBody>
+          <a:bodyPr wrap="square" rtlCol="0">
+            <a:spAutoFit/>
+          </a:bodyPr>
+          <a:lstStyle/>
+          <a:p>
+            <a:pPr algn="r"/>
+            <a:r>
+              <a:rPr lang="en-US" sz="1600" dirty="0">
+                <a:solidFill>
+                  <a:schemeClr val="accent6"/>
+                </a:solidFill>
+                <a:latin typeface="Wingdings 3" panose="05040102010807070707" pitchFamily="18" charset="2"/>
+              </a:rPr>
+              <a:t>z</a:t>
+            </a:r>
+            <a:endParaRPr lang="en-US" sz="1600" dirty="0">
+              <a:solidFill>
+                <a:schemeClr val="accent6"/>
+              </a:solidFill>
+              <a:latin typeface="MS Shell Dlg 2" panose="020B0604030504040204" pitchFamily="34" charset="0"/>
+            </a:endParaRPr>
+          </a:p>
+        </p:txBody>
+      </p:sp>
+      <p:sp>
+        <p:nvSpPr>
           <p:cNvPr id="2" name="Title 1"/>
           <p:cNvSpPr>
             <a:spLocks noGrp="1"/>
@@ -396,16 +608,21 @@
             <p:ph type="title"/>
           </p:nvPr>
         </p:nvSpPr>
-        <p:spPr/>
-        <p:txBody>
-          <a:bodyPr/>
-          <a:lstStyle/>
-          <a:p>
-            <a:r>
-              <a:rPr lang="en-US" smtClean="0"/>
+        <p:spPr>
+          <a:xfrm>
+            <a:off x="1958857" y="808057"/>
+            <a:ext cx="5885350" cy="1077229"/>
+          </a:xfrm>
+        </p:spPr>
+        <p:txBody>
+          <a:bodyPr/>
+          <a:lstStyle/>
+          <a:p>
+            <a:r>
+              <a:rPr lang="en-US"/>
               <a:t>Click to edit Master title style</a:t>
             </a:r>
-            <a:endParaRPr lang="en-US"/>
+            <a:endParaRPr lang="en-US" dirty="0"/>
           </a:p>
         </p:txBody>
       </p:sp>
@@ -419,45 +636,50 @@
             <p:ph type="body" orient="vert" idx="1"/>
           </p:nvPr>
         </p:nvSpPr>
-        <p:spPr/>
+        <p:spPr>
+          <a:xfrm>
+            <a:off x="2120792" y="2049878"/>
+            <a:ext cx="5723414" cy="4000066"/>
+          </a:xfrm>
+        </p:spPr>
         <p:txBody>
           <a:bodyPr vert="eaVert"/>
           <a:lstStyle/>
           <a:p>
             <a:pPr lvl="0"/>
             <a:r>
-              <a:rPr lang="en-US" smtClean="0"/>
+              <a:rPr lang="en-US"/>
               <a:t>Click to edit Master text styles</a:t>
             </a:r>
           </a:p>
           <a:p>
             <a:pPr lvl="1"/>
             <a:r>
-              <a:rPr lang="en-US" smtClean="0"/>
+              <a:rPr lang="en-US"/>
               <a:t>Second level</a:t>
             </a:r>
           </a:p>
           <a:p>
             <a:pPr lvl="2"/>
             <a:r>
-              <a:rPr lang="en-US" smtClean="0"/>
+              <a:rPr lang="en-US"/>
               <a:t>Third level</a:t>
             </a:r>
           </a:p>
           <a:p>
             <a:pPr lvl="3"/>
             <a:r>
-              <a:rPr lang="en-US" smtClean="0"/>
+              <a:rPr lang="en-US"/>
               <a:t>Fourth level</a:t>
             </a:r>
           </a:p>
           <a:p>
             <a:pPr lvl="4"/>
             <a:r>
-              <a:rPr lang="en-US" smtClean="0"/>
+              <a:rPr lang="en-US"/>
               <a:t>Fifth level</a:t>
             </a:r>
-            <a:endParaRPr lang="en-US"/>
+            <a:endParaRPr lang="en-US" dirty="0"/>
           </a:p>
         </p:txBody>
       </p:sp>
@@ -478,7 +700,7 @@
           <a:p>
             <a:fld id="{5BCAD085-E8A6-8845-BD4E-CB4CCA059FC4}" type="datetimeFigureOut">
               <a:rPr lang="en-US" smtClean="0"/>
-              <a:t>1/27/13</a:t>
+              <a:t>9/26/25</a:t>
             </a:fld>
             <a:endParaRPr lang="en-US"/>
           </a:p>
@@ -529,7 +751,7 @@
     </p:spTree>
     <p:extLst>
       <p:ext uri="{BB962C8B-B14F-4D97-AF65-F5344CB8AC3E}">
-        <p14:creationId xmlns:p14="http://schemas.microsoft.com/office/powerpoint/2010/main" val="2910927964"/>
+        <p14:creationId xmlns:p14="http://schemas.microsoft.com/office/powerpoint/2010/main" val="2513641883"/>
       </p:ext>
     </p:extLst>
   </p:cSld>
@@ -558,29 +780,152 @@
       </p:grpSpPr>
       <p:sp>
         <p:nvSpPr>
-          <p:cNvPr id="2" name="Vertical Title 1"/>
-          <p:cNvSpPr>
-            <a:spLocks noGrp="1"/>
-          </p:cNvSpPr>
-          <p:nvPr>
-            <p:ph type="title" orient="vert"/>
-          </p:nvPr>
+          <p:cNvPr id="18" name="Rectangle 17"/>
+          <p:cNvSpPr/>
+          <p:nvPr/>
         </p:nvSpPr>
         <p:spPr>
           <a:xfrm>
-            <a:off x="6629400" y="274638"/>
-            <a:ext cx="2057400" cy="5851525"/>
+            <a:off x="1007534" y="0"/>
+            <a:ext cx="7315560" cy="6858000"/>
+          </a:xfrm>
+          <a:prstGeom prst="rect">
+            <a:avLst/>
+          </a:prstGeom>
+          <a:solidFill>
+            <a:schemeClr val="bg2">
+              <a:alpha val="92000"/>
+            </a:schemeClr>
+          </a:solidFill>
+          <a:ln>
+            <a:noFill/>
+          </a:ln>
+        </p:spPr>
+        <p:style>
+          <a:lnRef idx="2">
+            <a:schemeClr val="accent1">
+              <a:shade val="50000"/>
+            </a:schemeClr>
+          </a:lnRef>
+          <a:fillRef idx="1">
+            <a:schemeClr val="accent1"/>
+          </a:fillRef>
+          <a:effectRef idx="0">
+            <a:schemeClr val="accent1"/>
+          </a:effectRef>
+          <a:fontRef idx="minor">
+            <a:schemeClr val="lt1"/>
+          </a:fontRef>
+        </p:style>
+      </p:sp>
+      <p:sp>
+        <p:nvSpPr>
+          <p:cNvPr id="19" name="Rectangle 18"/>
+          <p:cNvSpPr/>
+          <p:nvPr/>
+        </p:nvSpPr>
+        <p:spPr>
+          <a:xfrm>
+            <a:off x="8321168" y="0"/>
+            <a:ext cx="27432" cy="6858000"/>
+          </a:xfrm>
+          <a:prstGeom prst="rect">
+            <a:avLst/>
+          </a:prstGeom>
+          <a:solidFill>
+            <a:schemeClr val="accent6"/>
+          </a:solidFill>
+          <a:ln>
+            <a:noFill/>
+          </a:ln>
+        </p:spPr>
+        <p:style>
+          <a:lnRef idx="2">
+            <a:schemeClr val="accent1">
+              <a:shade val="50000"/>
+            </a:schemeClr>
+          </a:lnRef>
+          <a:fillRef idx="1">
+            <a:schemeClr val="accent1"/>
+          </a:fillRef>
+          <a:effectRef idx="0">
+            <a:schemeClr val="accent1"/>
+          </a:effectRef>
+          <a:fontRef idx="minor">
+            <a:schemeClr val="lt1"/>
+          </a:fontRef>
+        </p:style>
+      </p:sp>
+      <p:sp>
+        <p:nvSpPr>
+          <p:cNvPr id="23" name="TextBox 22"/>
+          <p:cNvSpPr txBox="1"/>
+          <p:nvPr/>
+        </p:nvSpPr>
+        <p:spPr>
+          <a:xfrm rot="5400000">
+            <a:off x="7688343" y="480678"/>
+            <a:ext cx="311727" cy="338554"/>
+          </a:xfrm>
+          <a:prstGeom prst="rect">
+            <a:avLst/>
+          </a:prstGeom>
+          <a:noFill/>
+        </p:spPr>
+        <p:txBody>
+          <a:bodyPr wrap="square" rtlCol="0">
+            <a:spAutoFit/>
+          </a:bodyPr>
+          <a:lstStyle/>
+          <a:p>
+            <a:pPr algn="r"/>
+            <a:r>
+              <a:rPr lang="en-US" sz="1600" dirty="0">
+                <a:solidFill>
+                  <a:schemeClr val="accent6"/>
+                </a:solidFill>
+                <a:latin typeface="Wingdings 3" panose="05040102010807070707" pitchFamily="18" charset="2"/>
+              </a:rPr>
+              <a:t>z</a:t>
+            </a:r>
+            <a:endParaRPr lang="en-US" sz="1600" dirty="0">
+              <a:solidFill>
+                <a:schemeClr val="accent6"/>
+              </a:solidFill>
+              <a:latin typeface="MS Shell Dlg 2" panose="020B0604030504040204" pitchFamily="34" charset="0"/>
+            </a:endParaRPr>
+          </a:p>
+        </p:txBody>
+      </p:sp>
+      <p:sp>
+        <p:nvSpPr>
+          <p:cNvPr id="2" name="Vertical Title 1"/>
+          <p:cNvSpPr>
+            <a:spLocks noGrp="1"/>
+          </p:cNvSpPr>
+          <p:nvPr>
+            <p:ph type="title" orient="vert"/>
+          </p:nvPr>
+        </p:nvSpPr>
+        <p:spPr>
+          <a:xfrm>
+            <a:off x="6849317" y="805818"/>
+            <a:ext cx="994889" cy="5244126"/>
           </a:xfrm>
         </p:spPr>
         <p:txBody>
           <a:bodyPr vert="eaVert"/>
-          <a:lstStyle/>
-          <a:p>
-            <a:r>
-              <a:rPr lang="en-US" smtClean="0"/>
+          <a:lstStyle>
+            <a:lvl1pPr algn="l">
+              <a:defRPr/>
+            </a:lvl1pPr>
+          </a:lstStyle>
+          <a:p>
+            <a:r>
+              <a:rPr lang="en-US"/>
               <a:t>Click to edit Master title style</a:t>
             </a:r>
-            <a:endParaRPr lang="en-US"/>
+            <a:endParaRPr lang="en-US" dirty="0"/>
           </a:p>
         </p:txBody>
       </p:sp>
@@ -596,8 +941,8 @@
         </p:nvSpPr>
         <p:spPr>
           <a:xfrm>
-            <a:off x="457200" y="274638"/>
-            <a:ext cx="6019800" cy="5851525"/>
+            <a:off x="1964598" y="970410"/>
+            <a:ext cx="4715441" cy="5079534"/>
           </a:xfrm>
         </p:spPr>
         <p:txBody>
@@ -606,38 +951,38 @@
           <a:p>
             <a:pPr lvl="0"/>
             <a:r>
-              <a:rPr lang="en-US" smtClean="0"/>
+              <a:rPr lang="en-US"/>
               <a:t>Click to edit Master text styles</a:t>
             </a:r>
           </a:p>
           <a:p>
             <a:pPr lvl="1"/>
             <a:r>
-              <a:rPr lang="en-US" smtClean="0"/>
+              <a:rPr lang="en-US"/>
               <a:t>Second level</a:t>
             </a:r>
           </a:p>
           <a:p>
             <a:pPr lvl="2"/>
             <a:r>
-              <a:rPr lang="en-US" smtClean="0"/>
+              <a:rPr lang="en-US"/>
               <a:t>Third level</a:t>
             </a:r>
           </a:p>
           <a:p>
             <a:pPr lvl="3"/>
             <a:r>
-              <a:rPr lang="en-US" smtClean="0"/>
+              <a:rPr lang="en-US"/>
               <a:t>Fourth level</a:t>
             </a:r>
           </a:p>
           <a:p>
             <a:pPr lvl="4"/>
             <a:r>
-              <a:rPr lang="en-US" smtClean="0"/>
+              <a:rPr lang="en-US"/>
               <a:t>Fifth level</a:t>
             </a:r>
-            <a:endParaRPr lang="en-US"/>
+            <a:endParaRPr lang="en-US" dirty="0"/>
           </a:p>
         </p:txBody>
       </p:sp>
@@ -658,7 +1003,7 @@
           <a:p>
             <a:fld id="{5BCAD085-E8A6-8845-BD4E-CB4CCA059FC4}" type="datetimeFigureOut">
               <a:rPr lang="en-US" smtClean="0"/>
-              <a:t>1/27/13</a:t>
+              <a:t>9/26/25</a:t>
             </a:fld>
             <a:endParaRPr lang="en-US"/>
           </a:p>
@@ -709,7 +1054,7 @@
     </p:spTree>
     <p:extLst>
       <p:ext uri="{BB962C8B-B14F-4D97-AF65-F5344CB8AC3E}">
-        <p14:creationId xmlns:p14="http://schemas.microsoft.com/office/powerpoint/2010/main" val="3612223792"/>
+        <p14:creationId xmlns:p14="http://schemas.microsoft.com/office/powerpoint/2010/main" val="3934919283"/>
       </p:ext>
     </p:extLst>
   </p:cSld>
@@ -738,6 +1083,84 @@
       </p:grpSpPr>
       <p:sp>
         <p:nvSpPr>
+          <p:cNvPr id="9" name="Rectangle 8"/>
+          <p:cNvSpPr/>
+          <p:nvPr/>
+        </p:nvSpPr>
+        <p:spPr>
+          <a:xfrm>
+            <a:off x="8321168" y="0"/>
+            <a:ext cx="27432" cy="6858000"/>
+          </a:xfrm>
+          <a:prstGeom prst="rect">
+            <a:avLst/>
+          </a:prstGeom>
+          <a:solidFill>
+            <a:schemeClr val="accent6"/>
+          </a:solidFill>
+          <a:ln>
+            <a:noFill/>
+          </a:ln>
+        </p:spPr>
+        <p:style>
+          <a:lnRef idx="2">
+            <a:schemeClr val="accent1">
+              <a:shade val="50000"/>
+            </a:schemeClr>
+          </a:lnRef>
+          <a:fillRef idx="1">
+            <a:schemeClr val="accent1"/>
+          </a:fillRef>
+          <a:effectRef idx="0">
+            <a:schemeClr val="accent1"/>
+          </a:effectRef>
+          <a:fontRef idx="minor">
+            <a:schemeClr val="lt1"/>
+          </a:fontRef>
+        </p:style>
+      </p:sp>
+      <p:sp>
+        <p:nvSpPr>
+          <p:cNvPr id="10" name="Rectangle 9"/>
+          <p:cNvSpPr/>
+          <p:nvPr/>
+        </p:nvSpPr>
+        <p:spPr>
+          <a:xfrm>
+            <a:off x="1007534" y="0"/>
+            <a:ext cx="7315560" cy="6858000"/>
+          </a:xfrm>
+          <a:prstGeom prst="rect">
+            <a:avLst/>
+          </a:prstGeom>
+          <a:solidFill>
+            <a:schemeClr val="bg2">
+              <a:alpha val="92000"/>
+            </a:schemeClr>
+          </a:solidFill>
+          <a:ln>
+            <a:noFill/>
+          </a:ln>
+        </p:spPr>
+        <p:style>
+          <a:lnRef idx="2">
+            <a:schemeClr val="accent1">
+              <a:shade val="50000"/>
+            </a:schemeClr>
+          </a:lnRef>
+          <a:fillRef idx="1">
+            <a:schemeClr val="accent1"/>
+          </a:fillRef>
+          <a:effectRef idx="0">
+            <a:schemeClr val="accent1"/>
+          </a:effectRef>
+          <a:fontRef idx="minor">
+            <a:schemeClr val="lt1"/>
+          </a:fontRef>
+        </p:style>
+      </p:sp>
+      <p:sp>
+        <p:nvSpPr>
           <p:cNvPr id="2" name="Title 1"/>
           <p:cNvSpPr>
             <a:spLocks noGrp="1"/>
@@ -752,10 +1175,10 @@
           <a:lstStyle/>
           <a:p>
             <a:r>
-              <a:rPr lang="en-US" smtClean="0"/>
+              <a:rPr lang="en-US"/>
               <a:t>Click to edit Master title style</a:t>
             </a:r>
-            <a:endParaRPr lang="en-US"/>
+            <a:endParaRPr lang="en-US" dirty="0"/>
           </a:p>
         </p:txBody>
       </p:sp>
@@ -771,43 +1194,43 @@
         </p:nvSpPr>
         <p:spPr/>
         <p:txBody>
-          <a:bodyPr/>
+          <a:bodyPr anchor="ctr"/>
           <a:lstStyle/>
           <a:p>
             <a:pPr lvl="0"/>
             <a:r>
-              <a:rPr lang="en-US" smtClean="0"/>
+              <a:rPr lang="en-US"/>
               <a:t>Click to edit Master text styles</a:t>
             </a:r>
           </a:p>
           <a:p>
             <a:pPr lvl="1"/>
             <a:r>
-              <a:rPr lang="en-US" smtClean="0"/>
+              <a:rPr lang="en-US"/>
               <a:t>Second level</a:t>
             </a:r>
           </a:p>
           <a:p>
             <a:pPr lvl="2"/>
             <a:r>
-              <a:rPr lang="en-US" smtClean="0"/>
+              <a:rPr lang="en-US"/>
               <a:t>Third level</a:t>
             </a:r>
           </a:p>
           <a:p>
             <a:pPr lvl="3"/>
             <a:r>
-              <a:rPr lang="en-US" smtClean="0"/>
+              <a:rPr lang="en-US"/>
               <a:t>Fourth level</a:t>
             </a:r>
           </a:p>
           <a:p>
             <a:pPr lvl="4"/>
             <a:r>
-              <a:rPr lang="en-US" smtClean="0"/>
+              <a:rPr lang="en-US"/>
               <a:t>Fifth level</a:t>
             </a:r>
-            <a:endParaRPr lang="en-US"/>
+            <a:endParaRPr lang="en-US" dirty="0"/>
           </a:p>
         </p:txBody>
       </p:sp>
@@ -828,7 +1251,7 @@
           <a:p>
             <a:fld id="{5BCAD085-E8A6-8845-BD4E-CB4CCA059FC4}" type="datetimeFigureOut">
               <a:rPr lang="en-US" smtClean="0"/>
-              <a:t>1/27/13</a:t>
+              <a:t>9/26/25</a:t>
             </a:fld>
             <a:endParaRPr lang="en-US"/>
           </a:p>
@@ -876,10 +1299,51 @@
           </a:p>
         </p:txBody>
       </p:sp>
+      <p:sp>
+        <p:nvSpPr>
+          <p:cNvPr id="7" name="TextBox 6"/>
+          <p:cNvSpPr txBox="1"/>
+          <p:nvPr/>
+        </p:nvSpPr>
+        <p:spPr>
+          <a:xfrm>
+            <a:off x="1651862" y="636541"/>
+            <a:ext cx="311727" cy="338554"/>
+          </a:xfrm>
+          <a:prstGeom prst="rect">
+            <a:avLst/>
+          </a:prstGeom>
+          <a:noFill/>
+        </p:spPr>
+        <p:txBody>
+          <a:bodyPr wrap="square" rtlCol="0">
+            <a:spAutoFit/>
+          </a:bodyPr>
+          <a:lstStyle/>
+          <a:p>
+            <a:pPr algn="r"/>
+            <a:r>
+              <a:rPr lang="en-US" sz="1600" dirty="0">
+                <a:solidFill>
+                  <a:schemeClr val="accent6"/>
+                </a:solidFill>
+                <a:latin typeface="Wingdings 3" panose="05040102010807070707" pitchFamily="18" charset="2"/>
+              </a:rPr>
+              <a:t>z</a:t>
+            </a:r>
+            <a:endParaRPr lang="en-US" sz="1600" dirty="0">
+              <a:solidFill>
+                <a:schemeClr val="accent6"/>
+              </a:solidFill>
+              <a:latin typeface="MS Shell Dlg 2" panose="020B0604030504040204" pitchFamily="34" charset="0"/>
+            </a:endParaRPr>
+          </a:p>
+        </p:txBody>
+      </p:sp>
     </p:spTree>
     <p:extLst>
       <p:ext uri="{BB962C8B-B14F-4D97-AF65-F5344CB8AC3E}">
-        <p14:creationId xmlns:p14="http://schemas.microsoft.com/office/powerpoint/2010/main" val="2614314258"/>
+        <p14:creationId xmlns:p14="http://schemas.microsoft.com/office/powerpoint/2010/main" val="4146879109"/>
       </p:ext>
     </p:extLst>
   </p:cSld>
@@ -908,33 +1372,113 @@
       </p:grpSpPr>
       <p:sp>
         <p:nvSpPr>
-          <p:cNvPr id="2" name="Title 1"/>
-          <p:cNvSpPr>
-            <a:spLocks noGrp="1"/>
-          </p:cNvSpPr>
-          <p:nvPr>
-            <p:ph type="title"/>
-          </p:nvPr>
+          <p:cNvPr id="10" name="Rectangle 9"/>
+          <p:cNvSpPr/>
+          <p:nvPr/>
         </p:nvSpPr>
         <p:spPr>
           <a:xfrm>
-            <a:off x="722313" y="4406900"/>
-            <a:ext cx="7772400" cy="1362075"/>
+            <a:off x="1007534" y="0"/>
+            <a:ext cx="7315560" cy="6858000"/>
+          </a:xfrm>
+          <a:prstGeom prst="rect">
+            <a:avLst/>
+          </a:prstGeom>
+          <a:solidFill>
+            <a:schemeClr val="bg2">
+              <a:alpha val="92000"/>
+            </a:schemeClr>
+          </a:solidFill>
+          <a:ln>
+            <a:noFill/>
+          </a:ln>
+        </p:spPr>
+        <p:style>
+          <a:lnRef idx="2">
+            <a:schemeClr val="accent1">
+              <a:shade val="50000"/>
+            </a:schemeClr>
+          </a:lnRef>
+          <a:fillRef idx="1">
+            <a:schemeClr val="accent1"/>
+          </a:fillRef>
+          <a:effectRef idx="0">
+            <a:schemeClr val="accent1"/>
+          </a:effectRef>
+          <a:fontRef idx="minor">
+            <a:schemeClr val="lt1"/>
+          </a:fontRef>
+        </p:style>
+      </p:sp>
+      <p:sp>
+        <p:nvSpPr>
+          <p:cNvPr id="12" name="Rectangle 11"/>
+          <p:cNvSpPr/>
+          <p:nvPr/>
+        </p:nvSpPr>
+        <p:spPr>
+          <a:xfrm>
+            <a:off x="8321168" y="0"/>
+            <a:ext cx="27432" cy="6858000"/>
+          </a:xfrm>
+          <a:prstGeom prst="rect">
+            <a:avLst/>
+          </a:prstGeom>
+          <a:solidFill>
+            <a:schemeClr val="accent6"/>
+          </a:solidFill>
+          <a:ln>
+            <a:noFill/>
+          </a:ln>
+        </p:spPr>
+        <p:style>
+          <a:lnRef idx="2">
+            <a:schemeClr val="accent1">
+              <a:shade val="50000"/>
+            </a:schemeClr>
+          </a:lnRef>
+          <a:fillRef idx="1">
+            <a:schemeClr val="accent1"/>
+          </a:fillRef>
+          <a:effectRef idx="0">
+            <a:schemeClr val="accent1"/>
+          </a:effectRef>
+          <a:fontRef idx="minor">
+            <a:schemeClr val="lt1"/>
+          </a:fontRef>
+        </p:style>
+      </p:sp>
+      <p:sp>
+        <p:nvSpPr>
+          <p:cNvPr id="2" name="Title 1"/>
+          <p:cNvSpPr>
+            <a:spLocks noGrp="1"/>
+          </p:cNvSpPr>
+          <p:nvPr>
+            <p:ph type="title"/>
+          </p:nvPr>
+        </p:nvSpPr>
+        <p:spPr>
+          <a:xfrm>
+            <a:off x="1957405" y="3199028"/>
+            <a:ext cx="5967420" cy="1372971"/>
           </a:xfrm>
         </p:spPr>
         <p:txBody>
-          <a:bodyPr anchor="t"/>
+          <a:bodyPr anchor="t">
+            <a:normAutofit/>
+          </a:bodyPr>
           <a:lstStyle>
-            <a:lvl1pPr algn="l">
-              <a:defRPr sz="4000" b="1" cap="all"/>
+            <a:lvl1pPr algn="r">
+              <a:defRPr sz="2800"/>
             </a:lvl1pPr>
           </a:lstStyle>
           <a:p>
             <a:r>
-              <a:rPr lang="en-US" smtClean="0"/>
+              <a:rPr lang="en-US"/>
               <a:t>Click to edit Master title style</a:t>
             </a:r>
-            <a:endParaRPr lang="en-US"/>
+            <a:endParaRPr lang="en-US" dirty="0"/>
           </a:p>
         </p:txBody>
       </p:sp>
@@ -950,26 +1494,26 @@
         </p:nvSpPr>
         <p:spPr>
           <a:xfrm>
-            <a:off x="722313" y="2906713"/>
-            <a:ext cx="7772400" cy="1500187"/>
+            <a:off x="2121131" y="2272143"/>
+            <a:ext cx="5803294" cy="926885"/>
           </a:xfrm>
         </p:spPr>
         <p:txBody>
-          <a:bodyPr anchor="b"/>
+          <a:bodyPr tIns="0" anchor="b">
+            <a:normAutofit/>
+          </a:bodyPr>
           <a:lstStyle>
-            <a:lvl1pPr marL="0" indent="0">
+            <a:lvl1pPr marL="0" indent="0" algn="r">
               <a:buNone/>
-              <a:defRPr sz="2000">
+              <a:defRPr sz="1600">
                 <a:solidFill>
-                  <a:schemeClr val="tx1">
-                    <a:tint val="75000"/>
-                  </a:schemeClr>
+                  <a:schemeClr val="tx1"/>
                 </a:solidFill>
               </a:defRPr>
             </a:lvl1pPr>
-            <a:lvl2pPr marL="457200" indent="0">
+            <a:lvl2pPr marL="342900" indent="0">
               <a:buNone/>
-              <a:defRPr sz="1800">
+              <a:defRPr sz="1500">
                 <a:solidFill>
                   <a:schemeClr val="tx1">
                     <a:tint val="75000"/>
@@ -977,9 +1521,9 @@
                 </a:solidFill>
               </a:defRPr>
             </a:lvl2pPr>
-            <a:lvl3pPr marL="914400" indent="0">
+            <a:lvl3pPr marL="685800" indent="0">
               <a:buNone/>
-              <a:defRPr sz="1600">
+              <a:defRPr sz="1350">
                 <a:solidFill>
                   <a:schemeClr val="tx1">
                     <a:tint val="75000"/>
@@ -987,9 +1531,9 @@
                 </a:solidFill>
               </a:defRPr>
             </a:lvl3pPr>
-            <a:lvl4pPr marL="1371600" indent="0">
+            <a:lvl4pPr marL="1028700" indent="0">
               <a:buNone/>
-              <a:defRPr sz="1400">
+              <a:defRPr sz="1200">
                 <a:solidFill>
                   <a:schemeClr val="tx1">
                     <a:tint val="75000"/>
@@ -997,9 +1541,9 @@
                 </a:solidFill>
               </a:defRPr>
             </a:lvl4pPr>
-            <a:lvl5pPr marL="1828800" indent="0">
+            <a:lvl5pPr marL="1371600" indent="0">
               <a:buNone/>
-              <a:defRPr sz="1400">
+              <a:defRPr sz="1200">
                 <a:solidFill>
                   <a:schemeClr val="tx1">
                     <a:tint val="75000"/>
@@ -1007,9 +1551,9 @@
                 </a:solidFill>
               </a:defRPr>
             </a:lvl5pPr>
-            <a:lvl6pPr marL="2286000" indent="0">
+            <a:lvl6pPr marL="1714500" indent="0">
               <a:buNone/>
-              <a:defRPr sz="1400">
+              <a:defRPr sz="1200">
                 <a:solidFill>
                   <a:schemeClr val="tx1">
                     <a:tint val="75000"/>
@@ -1017,9 +1561,9 @@
                 </a:solidFill>
               </a:defRPr>
             </a:lvl6pPr>
-            <a:lvl7pPr marL="2743200" indent="0">
+            <a:lvl7pPr marL="2057400" indent="0">
               <a:buNone/>
-              <a:defRPr sz="1400">
+              <a:defRPr sz="1200">
                 <a:solidFill>
                   <a:schemeClr val="tx1">
                     <a:tint val="75000"/>
@@ -1027,9 +1571,9 @@
                 </a:solidFill>
               </a:defRPr>
             </a:lvl7pPr>
-            <a:lvl8pPr marL="3200400" indent="0">
+            <a:lvl8pPr marL="2400300" indent="0">
               <a:buNone/>
-              <a:defRPr sz="1400">
+              <a:defRPr sz="1200">
                 <a:solidFill>
                   <a:schemeClr val="tx1">
                     <a:tint val="75000"/>
@@ -1037,9 +1581,9 @@
                 </a:solidFill>
               </a:defRPr>
             </a:lvl8pPr>
-            <a:lvl9pPr marL="3657600" indent="0">
+            <a:lvl9pPr marL="2743200" indent="0">
               <a:buNone/>
-              <a:defRPr sz="1400">
+              <a:defRPr sz="1200">
                 <a:solidFill>
                   <a:schemeClr val="tx1">
                     <a:tint val="75000"/>
@@ -1051,7 +1595,7 @@
           <a:p>
             <a:pPr lvl="0"/>
             <a:r>
-              <a:rPr lang="en-US" smtClean="0"/>
+              <a:rPr lang="en-US"/>
               <a:t>Click to edit Master text styles</a:t>
             </a:r>
           </a:p>
@@ -1074,7 +1618,7 @@
           <a:p>
             <a:fld id="{5BCAD085-E8A6-8845-BD4E-CB4CCA059FC4}" type="datetimeFigureOut">
               <a:rPr lang="en-US" smtClean="0"/>
-              <a:t>1/27/13</a:t>
+              <a:t>9/26/25</a:t>
             </a:fld>
             <a:endParaRPr lang="en-US"/>
           </a:p>
@@ -1122,10 +1666,51 @@
           </a:p>
         </p:txBody>
       </p:sp>
+      <p:sp>
+        <p:nvSpPr>
+          <p:cNvPr id="16" name="TextBox 15"/>
+          <p:cNvSpPr txBox="1"/>
+          <p:nvPr/>
+        </p:nvSpPr>
+        <p:spPr>
+          <a:xfrm>
+            <a:off x="1644924" y="3023993"/>
+            <a:ext cx="311727" cy="338554"/>
+          </a:xfrm>
+          <a:prstGeom prst="rect">
+            <a:avLst/>
+          </a:prstGeom>
+          <a:noFill/>
+        </p:spPr>
+        <p:txBody>
+          <a:bodyPr wrap="square" rtlCol="0">
+            <a:spAutoFit/>
+          </a:bodyPr>
+          <a:lstStyle/>
+          <a:p>
+            <a:pPr algn="r"/>
+            <a:r>
+              <a:rPr lang="en-US" sz="1600" dirty="0">
+                <a:solidFill>
+                  <a:schemeClr val="accent6"/>
+                </a:solidFill>
+                <a:latin typeface="Wingdings 3" panose="05040102010807070707" pitchFamily="18" charset="2"/>
+              </a:rPr>
+              <a:t>z</a:t>
+            </a:r>
+            <a:endParaRPr lang="en-US" sz="1600" dirty="0">
+              <a:solidFill>
+                <a:schemeClr val="accent6"/>
+              </a:solidFill>
+              <a:latin typeface="MS Shell Dlg 2" panose="020B0604030504040204" pitchFamily="34" charset="0"/>
+            </a:endParaRPr>
+          </a:p>
+        </p:txBody>
+      </p:sp>
     </p:spTree>
     <p:extLst>
       <p:ext uri="{BB962C8B-B14F-4D97-AF65-F5344CB8AC3E}">
-        <p14:creationId xmlns:p14="http://schemas.microsoft.com/office/powerpoint/2010/main" val="960648375"/>
+        <p14:creationId xmlns:p14="http://schemas.microsoft.com/office/powerpoint/2010/main" val="2209650795"/>
       </p:ext>
     </p:extLst>
   </p:cSld>
@@ -1154,194 +1739,183 @@
       </p:grpSpPr>
       <p:sp>
         <p:nvSpPr>
-          <p:cNvPr id="2" name="Title 1"/>
-          <p:cNvSpPr>
-            <a:spLocks noGrp="1"/>
-          </p:cNvSpPr>
-          <p:nvPr>
-            <p:ph type="title"/>
-          </p:nvPr>
-        </p:nvSpPr>
-        <p:spPr/>
-        <p:txBody>
-          <a:bodyPr/>
-          <a:lstStyle/>
-          <a:p>
-            <a:r>
-              <a:rPr lang="en-US" smtClean="0"/>
-              <a:t>Click to edit Master title style</a:t>
-            </a:r>
-            <a:endParaRPr lang="en-US"/>
-          </a:p>
-        </p:txBody>
-      </p:sp>
-      <p:sp>
-        <p:nvSpPr>
-          <p:cNvPr id="3" name="Content Placeholder 2"/>
-          <p:cNvSpPr>
-            <a:spLocks noGrp="1"/>
-          </p:cNvSpPr>
-          <p:nvPr>
-            <p:ph sz="half" idx="1"/>
-          </p:nvPr>
+          <p:cNvPr id="12" name="Rectangle 11"/>
+          <p:cNvSpPr/>
+          <p:nvPr/>
         </p:nvSpPr>
         <p:spPr>
           <a:xfrm>
-            <a:off x="457200" y="1600200"/>
-            <a:ext cx="4038600" cy="4525963"/>
+            <a:off x="1007534" y="0"/>
+            <a:ext cx="7315560" cy="6858000"/>
+          </a:xfrm>
+          <a:prstGeom prst="rect">
+            <a:avLst/>
+          </a:prstGeom>
+          <a:solidFill>
+            <a:schemeClr val="bg2">
+              <a:alpha val="92000"/>
+            </a:schemeClr>
+          </a:solidFill>
+          <a:ln>
+            <a:noFill/>
+          </a:ln>
+        </p:spPr>
+        <p:style>
+          <a:lnRef idx="2">
+            <a:schemeClr val="accent1">
+              <a:shade val="50000"/>
+            </a:schemeClr>
+          </a:lnRef>
+          <a:fillRef idx="1">
+            <a:schemeClr val="accent1"/>
+          </a:fillRef>
+          <a:effectRef idx="0">
+            <a:schemeClr val="accent1"/>
+          </a:effectRef>
+          <a:fontRef idx="minor">
+            <a:schemeClr val="lt1"/>
+          </a:fontRef>
+        </p:style>
+      </p:sp>
+      <p:sp>
+        <p:nvSpPr>
+          <p:cNvPr id="2" name="Title 1"/>
+          <p:cNvSpPr>
+            <a:spLocks noGrp="1"/>
+          </p:cNvSpPr>
+          <p:nvPr>
+            <p:ph type="title"/>
+          </p:nvPr>
+        </p:nvSpPr>
+        <p:spPr>
+          <a:xfrm>
+            <a:off x="1961426" y="805818"/>
+            <a:ext cx="5882780" cy="1081705"/>
           </a:xfrm>
         </p:spPr>
         <p:txBody>
           <a:bodyPr/>
-          <a:lstStyle>
-            <a:lvl1pPr>
-              <a:defRPr sz="2800"/>
-            </a:lvl1pPr>
-            <a:lvl2pPr>
-              <a:defRPr sz="2400"/>
-            </a:lvl2pPr>
-            <a:lvl3pPr>
-              <a:defRPr sz="2000"/>
-            </a:lvl3pPr>
-            <a:lvl4pPr>
-              <a:defRPr sz="1800"/>
-            </a:lvl4pPr>
-            <a:lvl5pPr>
-              <a:defRPr sz="1800"/>
-            </a:lvl5pPr>
-            <a:lvl6pPr>
-              <a:defRPr sz="1800"/>
-            </a:lvl6pPr>
-            <a:lvl7pPr>
-              <a:defRPr sz="1800"/>
-            </a:lvl7pPr>
-            <a:lvl8pPr>
-              <a:defRPr sz="1800"/>
-            </a:lvl8pPr>
-            <a:lvl9pPr>
-              <a:defRPr sz="1800"/>
-            </a:lvl9pPr>
-          </a:lstStyle>
-          <a:p>
-            <a:pPr lvl="0"/>
-            <a:r>
-              <a:rPr lang="en-US" smtClean="0"/>
-              <a:t>Click to edit Master text styles</a:t>
-            </a:r>
-          </a:p>
-          <a:p>
-            <a:pPr lvl="1"/>
-            <a:r>
-              <a:rPr lang="en-US" smtClean="0"/>
-              <a:t>Second level</a:t>
-            </a:r>
-          </a:p>
-          <a:p>
-            <a:pPr lvl="2"/>
-            <a:r>
-              <a:rPr lang="en-US" smtClean="0"/>
-              <a:t>Third level</a:t>
-            </a:r>
-          </a:p>
-          <a:p>
-            <a:pPr lvl="3"/>
-            <a:r>
-              <a:rPr lang="en-US" smtClean="0"/>
-              <a:t>Fourth level</a:t>
-            </a:r>
-          </a:p>
-          <a:p>
-            <a:pPr lvl="4"/>
-            <a:r>
-              <a:rPr lang="en-US" smtClean="0"/>
-              <a:t>Fifth level</a:t>
-            </a:r>
-            <a:endParaRPr lang="en-US"/>
-          </a:p>
-        </p:txBody>
-      </p:sp>
-      <p:sp>
-        <p:nvSpPr>
-          <p:cNvPr id="4" name="Content Placeholder 3"/>
-          <p:cNvSpPr>
-            <a:spLocks noGrp="1"/>
-          </p:cNvSpPr>
-          <p:nvPr>
-            <p:ph sz="half" idx="2"/>
+          <a:lstStyle/>
+          <a:p>
+            <a:r>
+              <a:rPr lang="en-US"/>
+              <a:t>Click to edit Master title style</a:t>
+            </a:r>
+            <a:endParaRPr lang="en-US" dirty="0"/>
+          </a:p>
+        </p:txBody>
+      </p:sp>
+      <p:sp>
+        <p:nvSpPr>
+          <p:cNvPr id="3" name="Content Placeholder 2"/>
+          <p:cNvSpPr>
+            <a:spLocks noGrp="1"/>
+          </p:cNvSpPr>
+          <p:nvPr>
+            <p:ph sz="half" idx="1"/>
           </p:nvPr>
         </p:nvSpPr>
         <p:spPr>
           <a:xfrm>
-            <a:off x="4648200" y="1600200"/>
-            <a:ext cx="4038600" cy="4525963"/>
+            <a:off x="1965406" y="2056800"/>
+            <a:ext cx="2855547" cy="3993144"/>
           </a:xfrm>
         </p:spPr>
         <p:txBody>
           <a:bodyPr/>
-          <a:lstStyle>
-            <a:lvl1pPr>
-              <a:defRPr sz="2800"/>
-            </a:lvl1pPr>
-            <a:lvl2pPr>
-              <a:defRPr sz="2400"/>
-            </a:lvl2pPr>
-            <a:lvl3pPr>
-              <a:defRPr sz="2000"/>
-            </a:lvl3pPr>
-            <a:lvl4pPr>
-              <a:defRPr sz="1800"/>
-            </a:lvl4pPr>
-            <a:lvl5pPr>
-              <a:defRPr sz="1800"/>
-            </a:lvl5pPr>
-            <a:lvl6pPr>
-              <a:defRPr sz="1800"/>
-            </a:lvl6pPr>
-            <a:lvl7pPr>
-              <a:defRPr sz="1800"/>
-            </a:lvl7pPr>
-            <a:lvl8pPr>
-              <a:defRPr sz="1800"/>
-            </a:lvl8pPr>
-            <a:lvl9pPr>
-              <a:defRPr sz="1800"/>
-            </a:lvl9pPr>
-          </a:lstStyle>
+          <a:lstStyle/>
           <a:p>
             <a:pPr lvl="0"/>
             <a:r>
-              <a:rPr lang="en-US" smtClean="0"/>
+              <a:rPr lang="en-US"/>
               <a:t>Click to edit Master text styles</a:t>
             </a:r>
           </a:p>
           <a:p>
             <a:pPr lvl="1"/>
             <a:r>
-              <a:rPr lang="en-US" smtClean="0"/>
+              <a:rPr lang="en-US"/>
               <a:t>Second level</a:t>
             </a:r>
           </a:p>
           <a:p>
             <a:pPr lvl="2"/>
             <a:r>
-              <a:rPr lang="en-US" smtClean="0"/>
+              <a:rPr lang="en-US"/>
               <a:t>Third level</a:t>
             </a:r>
           </a:p>
           <a:p>
             <a:pPr lvl="3"/>
             <a:r>
-              <a:rPr lang="en-US" smtClean="0"/>
+              <a:rPr lang="en-US"/>
               <a:t>Fourth level</a:t>
             </a:r>
           </a:p>
           <a:p>
             <a:pPr lvl="4"/>
             <a:r>
-              <a:rPr lang="en-US" smtClean="0"/>
+              <a:rPr lang="en-US"/>
               <a:t>Fifth level</a:t>
             </a:r>
-            <a:endParaRPr lang="en-US"/>
+            <a:endParaRPr lang="en-US" dirty="0"/>
+          </a:p>
+        </p:txBody>
+      </p:sp>
+      <p:sp>
+        <p:nvSpPr>
+          <p:cNvPr id="4" name="Content Placeholder 3"/>
+          <p:cNvSpPr>
+            <a:spLocks noGrp="1"/>
+          </p:cNvSpPr>
+          <p:nvPr>
+            <p:ph sz="half" idx="2"/>
+          </p:nvPr>
+        </p:nvSpPr>
+        <p:spPr>
+          <a:xfrm>
+            <a:off x="4984679" y="2056800"/>
+            <a:ext cx="2859527" cy="3993144"/>
+          </a:xfrm>
+        </p:spPr>
+        <p:txBody>
+          <a:bodyPr/>
+          <a:lstStyle/>
+          <a:p>
+            <a:pPr lvl="0"/>
+            <a:r>
+              <a:rPr lang="en-US"/>
+              <a:t>Click to edit Master text styles</a:t>
+            </a:r>
+          </a:p>
+          <a:p>
+            <a:pPr lvl="1"/>
+            <a:r>
+              <a:rPr lang="en-US"/>
+              <a:t>Second level</a:t>
+            </a:r>
+          </a:p>
+          <a:p>
+            <a:pPr lvl="2"/>
+            <a:r>
+              <a:rPr lang="en-US"/>
+              <a:t>Third level</a:t>
+            </a:r>
+          </a:p>
+          <a:p>
+            <a:pPr lvl="3"/>
+            <a:r>
+              <a:rPr lang="en-US"/>
+              <a:t>Fourth level</a:t>
+            </a:r>
+          </a:p>
+          <a:p>
+            <a:pPr lvl="4"/>
+            <a:r>
+              <a:rPr lang="en-US"/>
+              <a:t>Fifth level</a:t>
+            </a:r>
+            <a:endParaRPr lang="en-US" dirty="0"/>
           </a:p>
         </p:txBody>
       </p:sp>
@@ -1362,7 +1936,7 @@
           <a:p>
             <a:fld id="{5BCAD085-E8A6-8845-BD4E-CB4CCA059FC4}" type="datetimeFigureOut">
               <a:rPr lang="en-US" smtClean="0"/>
-              <a:t>1/27/13</a:t>
+              <a:t>9/26/25</a:t>
             </a:fld>
             <a:endParaRPr lang="en-US"/>
           </a:p>
@@ -1410,10 +1984,89 @@
           </a:p>
         </p:txBody>
       </p:sp>
+      <p:sp>
+        <p:nvSpPr>
+          <p:cNvPr id="11" name="Rectangle 10"/>
+          <p:cNvSpPr/>
+          <p:nvPr/>
+        </p:nvSpPr>
+        <p:spPr>
+          <a:xfrm>
+            <a:off x="8321168" y="0"/>
+            <a:ext cx="27432" cy="6858000"/>
+          </a:xfrm>
+          <a:prstGeom prst="rect">
+            <a:avLst/>
+          </a:prstGeom>
+          <a:solidFill>
+            <a:schemeClr val="accent6"/>
+          </a:solidFill>
+          <a:ln>
+            <a:noFill/>
+          </a:ln>
+        </p:spPr>
+        <p:style>
+          <a:lnRef idx="2">
+            <a:schemeClr val="accent1">
+              <a:shade val="50000"/>
+            </a:schemeClr>
+          </a:lnRef>
+          <a:fillRef idx="1">
+            <a:schemeClr val="accent1"/>
+          </a:fillRef>
+          <a:effectRef idx="0">
+            <a:schemeClr val="accent1"/>
+          </a:effectRef>
+          <a:fontRef idx="minor">
+            <a:schemeClr val="lt1"/>
+          </a:fontRef>
+        </p:style>
+      </p:sp>
+      <p:sp>
+        <p:nvSpPr>
+          <p:cNvPr id="19" name="TextBox 18"/>
+          <p:cNvSpPr txBox="1"/>
+          <p:nvPr/>
+        </p:nvSpPr>
+        <p:spPr>
+          <a:xfrm>
+            <a:off x="1651862" y="636541"/>
+            <a:ext cx="311727" cy="338554"/>
+          </a:xfrm>
+          <a:prstGeom prst="rect">
+            <a:avLst/>
+          </a:prstGeom>
+          <a:noFill/>
+        </p:spPr>
+        <p:txBody>
+          <a:bodyPr wrap="square" rtlCol="0">
+            <a:spAutoFit/>
+          </a:bodyPr>
+          <a:lstStyle/>
+          <a:p>
+            <a:pPr algn="r"/>
+            <a:r>
+              <a:rPr lang="en-US" sz="1600" dirty="0">
+                <a:solidFill>
+                  <a:schemeClr val="accent6"/>
+                </a:solidFill>
+                <a:latin typeface="Wingdings 3" panose="05040102010807070707" pitchFamily="18" charset="2"/>
+              </a:rPr>
+              <a:t>z</a:t>
+            </a:r>
+            <a:endParaRPr lang="en-US" sz="1600" dirty="0">
+              <a:solidFill>
+                <a:schemeClr val="accent6"/>
+              </a:solidFill>
+              <a:latin typeface="MS Shell Dlg 2" panose="020B0604030504040204" pitchFamily="34" charset="0"/>
+            </a:endParaRPr>
+          </a:p>
+        </p:txBody>
+      </p:sp>
     </p:spTree>
     <p:extLst>
       <p:ext uri="{BB962C8B-B14F-4D97-AF65-F5344CB8AC3E}">
-        <p14:creationId xmlns:p14="http://schemas.microsoft.com/office/powerpoint/2010/main" val="2782244947"/>
+        <p14:creationId xmlns:p14="http://schemas.microsoft.com/office/powerpoint/2010/main" val="3029029141"/>
       </p:ext>
     </p:extLst>
   </p:cSld>
@@ -1442,91 +2095,220 @@
       </p:grpSpPr>
       <p:sp>
         <p:nvSpPr>
-          <p:cNvPr id="2" name="Title 1"/>
-          <p:cNvSpPr>
-            <a:spLocks noGrp="1"/>
-          </p:cNvSpPr>
-          <p:nvPr>
-            <p:ph type="title"/>
-          </p:nvPr>
-        </p:nvSpPr>
-        <p:spPr/>
-        <p:txBody>
-          <a:bodyPr/>
-          <a:lstStyle>
-            <a:lvl1pPr>
-              <a:defRPr/>
-            </a:lvl1pPr>
-          </a:lstStyle>
-          <a:p>
-            <a:r>
-              <a:rPr lang="en-US" smtClean="0"/>
-              <a:t>Click to edit Master title style</a:t>
-            </a:r>
-            <a:endParaRPr lang="en-US"/>
-          </a:p>
-        </p:txBody>
-      </p:sp>
-      <p:sp>
-        <p:nvSpPr>
-          <p:cNvPr id="3" name="Text Placeholder 2"/>
-          <p:cNvSpPr>
-            <a:spLocks noGrp="1"/>
-          </p:cNvSpPr>
-          <p:nvPr>
-            <p:ph type="body" idx="1"/>
-          </p:nvPr>
+          <p:cNvPr id="14" name="Rectangle 13"/>
+          <p:cNvSpPr/>
+          <p:nvPr/>
         </p:nvSpPr>
         <p:spPr>
           <a:xfrm>
-            <a:off x="457200" y="1535113"/>
-            <a:ext cx="4040188" cy="639762"/>
+            <a:off x="1007534" y="0"/>
+            <a:ext cx="7315560" cy="6858000"/>
+          </a:xfrm>
+          <a:prstGeom prst="rect">
+            <a:avLst/>
+          </a:prstGeom>
+          <a:solidFill>
+            <a:schemeClr val="bg2">
+              <a:alpha val="92000"/>
+            </a:schemeClr>
+          </a:solidFill>
+          <a:ln>
+            <a:noFill/>
+          </a:ln>
+        </p:spPr>
+        <p:style>
+          <a:lnRef idx="2">
+            <a:schemeClr val="accent1">
+              <a:shade val="50000"/>
+            </a:schemeClr>
+          </a:lnRef>
+          <a:fillRef idx="1">
+            <a:schemeClr val="accent1"/>
+          </a:fillRef>
+          <a:effectRef idx="0">
+            <a:schemeClr val="accent1"/>
+          </a:effectRef>
+          <a:fontRef idx="minor">
+            <a:schemeClr val="lt1"/>
+          </a:fontRef>
+        </p:style>
+      </p:sp>
+      <p:sp>
+        <p:nvSpPr>
+          <p:cNvPr id="15" name="Rectangle 14"/>
+          <p:cNvSpPr/>
+          <p:nvPr/>
+        </p:nvSpPr>
+        <p:spPr>
+          <a:xfrm>
+            <a:off x="8321168" y="0"/>
+            <a:ext cx="27432" cy="6858000"/>
+          </a:xfrm>
+          <a:prstGeom prst="rect">
+            <a:avLst/>
+          </a:prstGeom>
+          <a:solidFill>
+            <a:schemeClr val="accent6"/>
+          </a:solidFill>
+          <a:ln>
+            <a:noFill/>
+          </a:ln>
+        </p:spPr>
+        <p:style>
+          <a:lnRef idx="2">
+            <a:schemeClr val="accent1">
+              <a:shade val="50000"/>
+            </a:schemeClr>
+          </a:lnRef>
+          <a:fillRef idx="1">
+            <a:schemeClr val="accent1"/>
+          </a:fillRef>
+          <a:effectRef idx="0">
+            <a:schemeClr val="accent1"/>
+          </a:effectRef>
+          <a:fontRef idx="minor">
+            <a:schemeClr val="lt1"/>
+          </a:fontRef>
+        </p:style>
+      </p:sp>
+      <p:sp>
+        <p:nvSpPr>
+          <p:cNvPr id="24" name="TextBox 23"/>
+          <p:cNvSpPr txBox="1"/>
+          <p:nvPr/>
+        </p:nvSpPr>
+        <p:spPr>
+          <a:xfrm>
+            <a:off x="1651862" y="636541"/>
+            <a:ext cx="311727" cy="338554"/>
+          </a:xfrm>
+          <a:prstGeom prst="rect">
+            <a:avLst/>
+          </a:prstGeom>
+          <a:noFill/>
+        </p:spPr>
+        <p:txBody>
+          <a:bodyPr wrap="square" rtlCol="0">
+            <a:spAutoFit/>
+          </a:bodyPr>
+          <a:lstStyle/>
+          <a:p>
+            <a:pPr algn="r"/>
+            <a:r>
+              <a:rPr lang="en-US" sz="1600" dirty="0">
+                <a:solidFill>
+                  <a:schemeClr val="accent6"/>
+                </a:solidFill>
+                <a:latin typeface="Wingdings 3" panose="05040102010807070707" pitchFamily="18" charset="2"/>
+              </a:rPr>
+              <a:t>z</a:t>
+            </a:r>
+            <a:endParaRPr lang="en-US" sz="1600" dirty="0">
+              <a:solidFill>
+                <a:schemeClr val="accent6"/>
+              </a:solidFill>
+              <a:latin typeface="MS Shell Dlg 2" panose="020B0604030504040204" pitchFamily="34" charset="0"/>
+            </a:endParaRPr>
+          </a:p>
+        </p:txBody>
+      </p:sp>
+      <p:sp>
+        <p:nvSpPr>
+          <p:cNvPr id="2" name="Title 1"/>
+          <p:cNvSpPr>
+            <a:spLocks noGrp="1"/>
+          </p:cNvSpPr>
+          <p:nvPr>
+            <p:ph type="title"/>
+          </p:nvPr>
+        </p:nvSpPr>
+        <p:spPr>
+          <a:xfrm>
+            <a:off x="1963589" y="805818"/>
+            <a:ext cx="5880617" cy="1077020"/>
           </a:xfrm>
         </p:spPr>
         <p:txBody>
-          <a:bodyPr anchor="b"/>
+          <a:bodyPr/>
+          <a:lstStyle/>
+          <a:p>
+            <a:r>
+              <a:rPr lang="en-US"/>
+              <a:t>Click to edit Master title style</a:t>
+            </a:r>
+            <a:endParaRPr lang="en-US" dirty="0"/>
+          </a:p>
+        </p:txBody>
+      </p:sp>
+      <p:sp>
+        <p:nvSpPr>
+          <p:cNvPr id="3" name="Text Placeholder 2"/>
+          <p:cNvSpPr>
+            <a:spLocks noGrp="1"/>
+          </p:cNvSpPr>
+          <p:nvPr>
+            <p:ph type="body" idx="1"/>
+          </p:nvPr>
+        </p:nvSpPr>
+        <p:spPr>
+          <a:xfrm>
+            <a:off x="1963589" y="2054563"/>
+            <a:ext cx="2857364" cy="713818"/>
+          </a:xfrm>
+        </p:spPr>
+        <p:txBody>
+          <a:bodyPr anchor="b">
+            <a:noAutofit/>
+          </a:bodyPr>
           <a:lstStyle>
-            <a:lvl1pPr marL="0" indent="0">
+            <a:lvl1pPr marL="0" indent="0" algn="l">
+              <a:lnSpc>
+                <a:spcPct val="100000"/>
+              </a:lnSpc>
               <a:buNone/>
-              <a:defRPr sz="2400" b="1"/>
+              <a:defRPr sz="2000" b="0" cap="none" baseline="0">
+                <a:solidFill>
+                  <a:schemeClr val="accent6"/>
+                </a:solidFill>
+              </a:defRPr>
             </a:lvl1pPr>
-            <a:lvl2pPr marL="457200" indent="0">
+            <a:lvl2pPr marL="342900" indent="0">
               <a:buNone/>
-              <a:defRPr sz="2000" b="1"/>
+              <a:defRPr sz="1500" b="1"/>
             </a:lvl2pPr>
-            <a:lvl3pPr marL="914400" indent="0">
+            <a:lvl3pPr marL="685800" indent="0">
               <a:buNone/>
-              <a:defRPr sz="1800" b="1"/>
+              <a:defRPr sz="1350" b="1"/>
             </a:lvl3pPr>
-            <a:lvl4pPr marL="1371600" indent="0">
+            <a:lvl4pPr marL="1028700" indent="0">
               <a:buNone/>
-              <a:defRPr sz="1600" b="1"/>
+              <a:defRPr sz="1200" b="1"/>
             </a:lvl4pPr>
-            <a:lvl5pPr marL="1828800" indent="0">
+            <a:lvl5pPr marL="1371600" indent="0">
               <a:buNone/>
-              <a:defRPr sz="1600" b="1"/>
+              <a:defRPr sz="1200" b="1"/>
             </a:lvl5pPr>
-            <a:lvl6pPr marL="2286000" indent="0">
+            <a:lvl6pPr marL="1714500" indent="0">
               <a:buNone/>
-              <a:defRPr sz="1600" b="1"/>
+              <a:defRPr sz="1200" b="1"/>
             </a:lvl6pPr>
-            <a:lvl7pPr marL="2743200" indent="0">
+            <a:lvl7pPr marL="2057400" indent="0">
               <a:buNone/>
-              <a:defRPr sz="1600" b="1"/>
+              <a:defRPr sz="1200" b="1"/>
             </a:lvl7pPr>
-            <a:lvl8pPr marL="3200400" indent="0">
+            <a:lvl8pPr marL="2400300" indent="0">
               <a:buNone/>
-              <a:defRPr sz="1600" b="1"/>
+              <a:defRPr sz="1200" b="1"/>
             </a:lvl8pPr>
-            <a:lvl9pPr marL="3657600" indent="0">
+            <a:lvl9pPr marL="2743200" indent="0">
               <a:buNone/>
-              <a:defRPr sz="1600" b="1"/>
+              <a:defRPr sz="1200" b="1"/>
             </a:lvl9pPr>
           </a:lstStyle>
           <a:p>
             <a:pPr lvl="0"/>
             <a:r>
-              <a:rPr lang="en-US" smtClean="0"/>
+              <a:rPr lang="en-US"/>
               <a:t>Click to edit Master text styles</a:t>
             </a:r>
           </a:p>
@@ -1544,226 +2326,179 @@
         </p:nvSpPr>
         <p:spPr>
           <a:xfrm>
-            <a:off x="457200" y="2174875"/>
-            <a:ext cx="4040188" cy="3951288"/>
+            <a:off x="1962510" y="2851330"/>
+            <a:ext cx="2858443" cy="3198613"/>
           </a:xfrm>
         </p:spPr>
         <p:txBody>
           <a:bodyPr/>
+          <a:lstStyle/>
+          <a:p>
+            <a:pPr lvl="0"/>
+            <a:r>
+              <a:rPr lang="en-US"/>
+              <a:t>Click to edit Master text styles</a:t>
+            </a:r>
+          </a:p>
+          <a:p>
+            <a:pPr lvl="1"/>
+            <a:r>
+              <a:rPr lang="en-US"/>
+              <a:t>Second level</a:t>
+            </a:r>
+          </a:p>
+          <a:p>
+            <a:pPr lvl="2"/>
+            <a:r>
+              <a:rPr lang="en-US"/>
+              <a:t>Third level</a:t>
+            </a:r>
+          </a:p>
+          <a:p>
+            <a:pPr lvl="3"/>
+            <a:r>
+              <a:rPr lang="en-US"/>
+              <a:t>Fourth level</a:t>
+            </a:r>
+          </a:p>
+          <a:p>
+            <a:pPr lvl="4"/>
+            <a:r>
+              <a:rPr lang="en-US"/>
+              <a:t>Fifth level</a:t>
+            </a:r>
+            <a:endParaRPr lang="en-US" dirty="0"/>
+          </a:p>
+        </p:txBody>
+      </p:sp>
+      <p:sp>
+        <p:nvSpPr>
+          <p:cNvPr id="5" name="Text Placeholder 4"/>
+          <p:cNvSpPr>
+            <a:spLocks noGrp="1"/>
+          </p:cNvSpPr>
+          <p:nvPr>
+            <p:ph type="body" sz="quarter" idx="3"/>
+          </p:nvPr>
+        </p:nvSpPr>
+        <p:spPr>
+          <a:xfrm>
+            <a:off x="4984679" y="2054563"/>
+            <a:ext cx="2859527" cy="713818"/>
+          </a:xfrm>
+        </p:spPr>
+        <p:txBody>
+          <a:bodyPr anchor="b">
+            <a:noAutofit/>
+          </a:bodyPr>
           <a:lstStyle>
-            <a:lvl1pPr>
-              <a:defRPr sz="2400"/>
+            <a:lvl1pPr marL="0" indent="0" algn="l">
+              <a:lnSpc>
+                <a:spcPct val="100000"/>
+              </a:lnSpc>
+              <a:buNone/>
+              <a:defRPr sz="2000" b="0" cap="none" baseline="0">
+                <a:solidFill>
+                  <a:schemeClr val="accent6"/>
+                </a:solidFill>
+              </a:defRPr>
             </a:lvl1pPr>
-            <a:lvl2pPr>
-              <a:defRPr sz="2000"/>
+            <a:lvl2pPr marL="342900" indent="0">
+              <a:buNone/>
+              <a:defRPr sz="1500" b="1"/>
             </a:lvl2pPr>
-            <a:lvl3pPr>
-              <a:defRPr sz="1800"/>
+            <a:lvl3pPr marL="685800" indent="0">
+              <a:buNone/>
+              <a:defRPr sz="1350" b="1"/>
             </a:lvl3pPr>
-            <a:lvl4pPr>
-              <a:defRPr sz="1600"/>
+            <a:lvl4pPr marL="1028700" indent="0">
+              <a:buNone/>
+              <a:defRPr sz="1200" b="1"/>
             </a:lvl4pPr>
-            <a:lvl5pPr>
-              <a:defRPr sz="1600"/>
+            <a:lvl5pPr marL="1371600" indent="0">
+              <a:buNone/>
+              <a:defRPr sz="1200" b="1"/>
             </a:lvl5pPr>
-            <a:lvl6pPr>
-              <a:defRPr sz="1600"/>
+            <a:lvl6pPr marL="1714500" indent="0">
+              <a:buNone/>
+              <a:defRPr sz="1200" b="1"/>
             </a:lvl6pPr>
-            <a:lvl7pPr>
-              <a:defRPr sz="1600"/>
+            <a:lvl7pPr marL="2057400" indent="0">
+              <a:buNone/>
+              <a:defRPr sz="1200" b="1"/>
             </a:lvl7pPr>
-            <a:lvl8pPr>
-              <a:defRPr sz="1600"/>
+            <a:lvl8pPr marL="2400300" indent="0">
+              <a:buNone/>
+              <a:defRPr sz="1200" b="1"/>
             </a:lvl8pPr>
-            <a:lvl9pPr>
-              <a:defRPr sz="1600"/>
+            <a:lvl9pPr marL="2743200" indent="0">
+              <a:buNone/>
+              <a:defRPr sz="1200" b="1"/>
             </a:lvl9pPr>
           </a:lstStyle>
           <a:p>
             <a:pPr lvl="0"/>
             <a:r>
-              <a:rPr lang="en-US" smtClean="0"/>
+              <a:rPr lang="en-US"/>
               <a:t>Click to edit Master text styles</a:t>
             </a:r>
           </a:p>
-          <a:p>
-            <a:pPr lvl="1"/>
-            <a:r>
-              <a:rPr lang="en-US" smtClean="0"/>
-              <a:t>Second level</a:t>
-            </a:r>
-          </a:p>
-          <a:p>
-            <a:pPr lvl="2"/>
-            <a:r>
-              <a:rPr lang="en-US" smtClean="0"/>
-              <a:t>Third level</a:t>
-            </a:r>
-          </a:p>
-          <a:p>
-            <a:pPr lvl="3"/>
-            <a:r>
-              <a:rPr lang="en-US" smtClean="0"/>
-              <a:t>Fourth level</a:t>
-            </a:r>
-          </a:p>
-          <a:p>
-            <a:pPr lvl="4"/>
-            <a:r>
-              <a:rPr lang="en-US" smtClean="0"/>
-              <a:t>Fifth level</a:t>
-            </a:r>
-            <a:endParaRPr lang="en-US"/>
-          </a:p>
-        </p:txBody>
-      </p:sp>
-      <p:sp>
-        <p:nvSpPr>
-          <p:cNvPr id="5" name="Text Placeholder 4"/>
-          <p:cNvSpPr>
-            <a:spLocks noGrp="1"/>
-          </p:cNvSpPr>
-          <p:nvPr>
-            <p:ph type="body" sz="quarter" idx="3"/>
+        </p:txBody>
+      </p:sp>
+      <p:sp>
+        <p:nvSpPr>
+          <p:cNvPr id="6" name="Content Placeholder 5"/>
+          <p:cNvSpPr>
+            <a:spLocks noGrp="1"/>
+          </p:cNvSpPr>
+          <p:nvPr>
+            <p:ph sz="quarter" idx="4"/>
           </p:nvPr>
         </p:nvSpPr>
         <p:spPr>
           <a:xfrm>
-            <a:off x="4645025" y="1535113"/>
-            <a:ext cx="4041775" cy="639762"/>
+            <a:off x="4984680" y="2851330"/>
+            <a:ext cx="2859526" cy="3198613"/>
           </a:xfrm>
         </p:spPr>
         <p:txBody>
-          <a:bodyPr anchor="b"/>
-          <a:lstStyle>
-            <a:lvl1pPr marL="0" indent="0">
-              <a:buNone/>
-              <a:defRPr sz="2400" b="1"/>
-            </a:lvl1pPr>
-            <a:lvl2pPr marL="457200" indent="0">
-              <a:buNone/>
-              <a:defRPr sz="2000" b="1"/>
-            </a:lvl2pPr>
-            <a:lvl3pPr marL="914400" indent="0">
-              <a:buNone/>
-              <a:defRPr sz="1800" b="1"/>
-            </a:lvl3pPr>
-            <a:lvl4pPr marL="1371600" indent="0">
-              <a:buNone/>
-              <a:defRPr sz="1600" b="1"/>
-            </a:lvl4pPr>
-            <a:lvl5pPr marL="1828800" indent="0">
-              <a:buNone/>
-              <a:defRPr sz="1600" b="1"/>
-            </a:lvl5pPr>
-            <a:lvl6pPr marL="2286000" indent="0">
-              <a:buNone/>
-              <a:defRPr sz="1600" b="1"/>
-            </a:lvl6pPr>
-            <a:lvl7pPr marL="2743200" indent="0">
-              <a:buNone/>
-              <a:defRPr sz="1600" b="1"/>
-            </a:lvl7pPr>
-            <a:lvl8pPr marL="3200400" indent="0">
-              <a:buNone/>
-              <a:defRPr sz="1600" b="1"/>
-            </a:lvl8pPr>
-            <a:lvl9pPr marL="3657600" indent="0">
-              <a:buNone/>
-              <a:defRPr sz="1600" b="1"/>
-            </a:lvl9pPr>
-          </a:lstStyle>
+          <a:bodyPr/>
+          <a:lstStyle/>
           <a:p>
             <a:pPr lvl="0"/>
             <a:r>
-              <a:rPr lang="en-US" smtClean="0"/>
+              <a:rPr lang="en-US"/>
               <a:t>Click to edit Master text styles</a:t>
             </a:r>
           </a:p>
-        </p:txBody>
-      </p:sp>
-      <p:sp>
-        <p:nvSpPr>
-          <p:cNvPr id="6" name="Content Placeholder 5"/>
-          <p:cNvSpPr>
-            <a:spLocks noGrp="1"/>
-          </p:cNvSpPr>
-          <p:nvPr>
-            <p:ph sz="quarter" idx="4"/>
-          </p:nvPr>
-        </p:nvSpPr>
-        <p:spPr>
-          <a:xfrm>
-            <a:off x="4645025" y="2174875"/>
-            <a:ext cx="4041775" cy="3951288"/>
-          </a:xfrm>
-        </p:spPr>
-        <p:txBody>
-          <a:bodyPr/>
-          <a:lstStyle>
-            <a:lvl1pPr>
-              <a:defRPr sz="2400"/>
-            </a:lvl1pPr>
-            <a:lvl2pPr>
-              <a:defRPr sz="2000"/>
-            </a:lvl2pPr>
-            <a:lvl3pPr>
-              <a:defRPr sz="1800"/>
-            </a:lvl3pPr>
-            <a:lvl4pPr>
-              <a:defRPr sz="1600"/>
-            </a:lvl4pPr>
-            <a:lvl5pPr>
-              <a:defRPr sz="1600"/>
-            </a:lvl5pPr>
-            <a:lvl6pPr>
-              <a:defRPr sz="1600"/>
-            </a:lvl6pPr>
-            <a:lvl7pPr>
-              <a:defRPr sz="1600"/>
-            </a:lvl7pPr>
-            <a:lvl8pPr>
-              <a:defRPr sz="1600"/>
-            </a:lvl8pPr>
-            <a:lvl9pPr>
-              <a:defRPr sz="1600"/>
-            </a:lvl9pPr>
-          </a:lstStyle>
-          <a:p>
-            <a:pPr lvl="0"/>
-            <a:r>
-              <a:rPr lang="en-US" smtClean="0"/>
-              <a:t>Click to edit Master text styles</a:t>
-            </a:r>
-          </a:p>
           <a:p>
             <a:pPr lvl="1"/>
             <a:r>
-              <a:rPr lang="en-US" smtClean="0"/>
+              <a:rPr lang="en-US"/>
               <a:t>Second level</a:t>
             </a:r>
           </a:p>
           <a:p>
             <a:pPr lvl="2"/>
             <a:r>
-              <a:rPr lang="en-US" smtClean="0"/>
+              <a:rPr lang="en-US"/>
               <a:t>Third level</a:t>
             </a:r>
           </a:p>
           <a:p>
             <a:pPr lvl="3"/>
             <a:r>
-              <a:rPr lang="en-US" smtClean="0"/>
+              <a:rPr lang="en-US"/>
               <a:t>Fourth level</a:t>
             </a:r>
           </a:p>
           <a:p>
             <a:pPr lvl="4"/>
             <a:r>
-              <a:rPr lang="en-US" smtClean="0"/>
+              <a:rPr lang="en-US"/>
               <a:t>Fifth level</a:t>
             </a:r>
-            <a:endParaRPr lang="en-US"/>
+            <a:endParaRPr lang="en-US" dirty="0"/>
           </a:p>
         </p:txBody>
       </p:sp>
@@ -1784,7 +2519,7 @@
           <a:p>
             <a:fld id="{5BCAD085-E8A6-8845-BD4E-CB4CCA059FC4}" type="datetimeFigureOut">
               <a:rPr lang="en-US" smtClean="0"/>
-              <a:t>1/27/13</a:t>
+              <a:t>9/26/25</a:t>
             </a:fld>
             <a:endParaRPr lang="en-US"/>
           </a:p>
@@ -1835,7 +2570,7 @@
     </p:spTree>
     <p:extLst>
       <p:ext uri="{BB962C8B-B14F-4D97-AF65-F5344CB8AC3E}">
-        <p14:creationId xmlns:p14="http://schemas.microsoft.com/office/powerpoint/2010/main" val="990158736"/>
+        <p14:creationId xmlns:p14="http://schemas.microsoft.com/office/powerpoint/2010/main" val="1220637197"/>
       </p:ext>
     </p:extLst>
   </p:cSld>
@@ -1864,6 +2599,125 @@
       </p:grpSpPr>
       <p:sp>
         <p:nvSpPr>
+          <p:cNvPr id="9" name="Rectangle 8"/>
+          <p:cNvSpPr/>
+          <p:nvPr/>
+        </p:nvSpPr>
+        <p:spPr>
+          <a:xfrm>
+            <a:off x="1007534" y="0"/>
+            <a:ext cx="7315560" cy="6858000"/>
+          </a:xfrm>
+          <a:prstGeom prst="rect">
+            <a:avLst/>
+          </a:prstGeom>
+          <a:solidFill>
+            <a:schemeClr val="bg2">
+              <a:alpha val="92000"/>
+            </a:schemeClr>
+          </a:solidFill>
+          <a:ln>
+            <a:noFill/>
+          </a:ln>
+        </p:spPr>
+        <p:style>
+          <a:lnRef idx="2">
+            <a:schemeClr val="accent1">
+              <a:shade val="50000"/>
+            </a:schemeClr>
+          </a:lnRef>
+          <a:fillRef idx="1">
+            <a:schemeClr val="accent1"/>
+          </a:fillRef>
+          <a:effectRef idx="0">
+            <a:schemeClr val="accent1"/>
+          </a:effectRef>
+          <a:fontRef idx="minor">
+            <a:schemeClr val="lt1"/>
+          </a:fontRef>
+        </p:style>
+      </p:sp>
+      <p:sp>
+        <p:nvSpPr>
+          <p:cNvPr id="10" name="Rectangle 9"/>
+          <p:cNvSpPr/>
+          <p:nvPr/>
+        </p:nvSpPr>
+        <p:spPr>
+          <a:xfrm>
+            <a:off x="8321168" y="0"/>
+            <a:ext cx="27432" cy="6858000"/>
+          </a:xfrm>
+          <a:prstGeom prst="rect">
+            <a:avLst/>
+          </a:prstGeom>
+          <a:solidFill>
+            <a:schemeClr val="accent6"/>
+          </a:solidFill>
+          <a:ln>
+            <a:noFill/>
+          </a:ln>
+        </p:spPr>
+        <p:style>
+          <a:lnRef idx="2">
+            <a:schemeClr val="accent1">
+              <a:shade val="50000"/>
+            </a:schemeClr>
+          </a:lnRef>
+          <a:fillRef idx="1">
+            <a:schemeClr val="accent1"/>
+          </a:fillRef>
+          <a:effectRef idx="0">
+            <a:schemeClr val="accent1"/>
+          </a:effectRef>
+          <a:fontRef idx="minor">
+            <a:schemeClr val="lt1"/>
+          </a:fontRef>
+        </p:style>
+      </p:sp>
+      <p:sp>
+        <p:nvSpPr>
+          <p:cNvPr id="16" name="TextBox 15"/>
+          <p:cNvSpPr txBox="1"/>
+          <p:nvPr/>
+        </p:nvSpPr>
+        <p:spPr>
+          <a:xfrm>
+            <a:off x="1651862" y="636541"/>
+            <a:ext cx="311727" cy="338554"/>
+          </a:xfrm>
+          <a:prstGeom prst="rect">
+            <a:avLst/>
+          </a:prstGeom>
+          <a:noFill/>
+        </p:spPr>
+        <p:txBody>
+          <a:bodyPr wrap="square" rtlCol="0">
+            <a:spAutoFit/>
+          </a:bodyPr>
+          <a:lstStyle/>
+          <a:p>
+            <a:pPr algn="r"/>
+            <a:r>
+              <a:rPr lang="en-US" sz="1600" dirty="0">
+                <a:solidFill>
+                  <a:schemeClr val="accent6"/>
+                </a:solidFill>
+                <a:latin typeface="Wingdings 3" panose="05040102010807070707" pitchFamily="18" charset="2"/>
+              </a:rPr>
+              <a:t>z</a:t>
+            </a:r>
+            <a:endParaRPr lang="en-US" sz="1600" dirty="0">
+              <a:solidFill>
+                <a:schemeClr val="accent6"/>
+              </a:solidFill>
+              <a:latin typeface="MS Shell Dlg 2" panose="020B0604030504040204" pitchFamily="34" charset="0"/>
+            </a:endParaRPr>
+          </a:p>
+        </p:txBody>
+      </p:sp>
+      <p:sp>
+        <p:nvSpPr>
           <p:cNvPr id="2" name="Title 1"/>
           <p:cNvSpPr>
             <a:spLocks noGrp="1"/>
@@ -1878,10 +2732,10 @@
           <a:lstStyle/>
           <a:p>
             <a:r>
-              <a:rPr lang="en-US" smtClean="0"/>
+              <a:rPr lang="en-US"/>
               <a:t>Click to edit Master title style</a:t>
             </a:r>
-            <a:endParaRPr lang="en-US"/>
+            <a:endParaRPr lang="en-US" dirty="0"/>
           </a:p>
         </p:txBody>
       </p:sp>
@@ -1902,7 +2756,7 @@
           <a:p>
             <a:fld id="{5BCAD085-E8A6-8845-BD4E-CB4CCA059FC4}" type="datetimeFigureOut">
               <a:rPr lang="en-US" smtClean="0"/>
-              <a:t>1/27/13</a:t>
+              <a:t>9/26/25</a:t>
             </a:fld>
             <a:endParaRPr lang="en-US"/>
           </a:p>
@@ -1953,7 +2807,7 @@
     </p:spTree>
     <p:extLst>
       <p:ext uri="{BB962C8B-B14F-4D97-AF65-F5344CB8AC3E}">
-        <p14:creationId xmlns:p14="http://schemas.microsoft.com/office/powerpoint/2010/main" val="727027711"/>
+        <p14:creationId xmlns:p14="http://schemas.microsoft.com/office/powerpoint/2010/main" val="810129917"/>
       </p:ext>
     </p:extLst>
   </p:cSld>
@@ -1982,6 +2836,84 @@
       </p:grpSpPr>
       <p:sp>
         <p:nvSpPr>
+          <p:cNvPr id="9" name="Rectangle 8"/>
+          <p:cNvSpPr/>
+          <p:nvPr/>
+        </p:nvSpPr>
+        <p:spPr>
+          <a:xfrm>
+            <a:off x="1007534" y="0"/>
+            <a:ext cx="7315560" cy="6858000"/>
+          </a:xfrm>
+          <a:prstGeom prst="rect">
+            <a:avLst/>
+          </a:prstGeom>
+          <a:solidFill>
+            <a:schemeClr val="bg2">
+              <a:alpha val="92000"/>
+            </a:schemeClr>
+          </a:solidFill>
+          <a:ln>
+            <a:noFill/>
+          </a:ln>
+        </p:spPr>
+        <p:style>
+          <a:lnRef idx="2">
+            <a:schemeClr val="accent1">
+              <a:shade val="50000"/>
+            </a:schemeClr>
+          </a:lnRef>
+          <a:fillRef idx="1">
+            <a:schemeClr val="accent1"/>
+          </a:fillRef>
+          <a:effectRef idx="0">
+            <a:schemeClr val="accent1"/>
+          </a:effectRef>
+          <a:fontRef idx="minor">
+            <a:schemeClr val="lt1"/>
+          </a:fontRef>
+        </p:style>
+      </p:sp>
+      <p:sp>
+        <p:nvSpPr>
+          <p:cNvPr id="10" name="Rectangle 9"/>
+          <p:cNvSpPr/>
+          <p:nvPr/>
+        </p:nvSpPr>
+        <p:spPr>
+          <a:xfrm>
+            <a:off x="8321168" y="0"/>
+            <a:ext cx="27432" cy="6858000"/>
+          </a:xfrm>
+          <a:prstGeom prst="rect">
+            <a:avLst/>
+          </a:prstGeom>
+          <a:solidFill>
+            <a:schemeClr val="accent6"/>
+          </a:solidFill>
+          <a:ln>
+            <a:noFill/>
+          </a:ln>
+        </p:spPr>
+        <p:style>
+          <a:lnRef idx="2">
+            <a:schemeClr val="accent1">
+              <a:shade val="50000"/>
+            </a:schemeClr>
+          </a:lnRef>
+          <a:fillRef idx="1">
+            <a:schemeClr val="accent1"/>
+          </a:fillRef>
+          <a:effectRef idx="0">
+            <a:schemeClr val="accent1"/>
+          </a:effectRef>
+          <a:fontRef idx="minor">
+            <a:schemeClr val="lt1"/>
+          </a:fontRef>
+        </p:style>
+      </p:sp>
+      <p:sp>
+        <p:nvSpPr>
           <p:cNvPr id="2" name="Date Placeholder 1"/>
           <p:cNvSpPr>
             <a:spLocks noGrp="1"/>
@@ -1997,7 +2929,7 @@
           <a:p>
             <a:fld id="{5BCAD085-E8A6-8845-BD4E-CB4CCA059FC4}" type="datetimeFigureOut">
               <a:rPr lang="en-US" smtClean="0"/>
-              <a:t>1/27/13</a:t>
+              <a:t>9/26/25</a:t>
             </a:fld>
             <a:endParaRPr lang="en-US"/>
           </a:p>
@@ -2048,7 +2980,7 @@
     </p:spTree>
     <p:extLst>
       <p:ext uri="{BB962C8B-B14F-4D97-AF65-F5344CB8AC3E}">
-        <p14:creationId xmlns:p14="http://schemas.microsoft.com/office/powerpoint/2010/main" val="1212999818"/>
+        <p14:creationId xmlns:p14="http://schemas.microsoft.com/office/powerpoint/2010/main" val="2590703744"/>
       </p:ext>
     </p:extLst>
   </p:cSld>
@@ -2077,33 +3009,154 @@
       </p:grpSpPr>
       <p:sp>
         <p:nvSpPr>
-          <p:cNvPr id="2" name="Title 1"/>
-          <p:cNvSpPr>
-            <a:spLocks noGrp="1"/>
-          </p:cNvSpPr>
-          <p:nvPr>
-            <p:ph type="title"/>
-          </p:nvPr>
+          <p:cNvPr id="17" name="Rectangle 16"/>
+          <p:cNvSpPr/>
+          <p:nvPr/>
         </p:nvSpPr>
         <p:spPr>
           <a:xfrm>
-            <a:off x="457200" y="273050"/>
-            <a:ext cx="3008313" cy="1162050"/>
+            <a:off x="1007534" y="0"/>
+            <a:ext cx="7315560" cy="6858000"/>
+          </a:xfrm>
+          <a:prstGeom prst="rect">
+            <a:avLst/>
+          </a:prstGeom>
+          <a:solidFill>
+            <a:schemeClr val="bg2">
+              <a:alpha val="92000"/>
+            </a:schemeClr>
+          </a:solidFill>
+          <a:ln>
+            <a:noFill/>
+          </a:ln>
+        </p:spPr>
+        <p:style>
+          <a:lnRef idx="2">
+            <a:schemeClr val="accent1">
+              <a:shade val="50000"/>
+            </a:schemeClr>
+          </a:lnRef>
+          <a:fillRef idx="1">
+            <a:schemeClr val="accent1"/>
+          </a:fillRef>
+          <a:effectRef idx="0">
+            <a:schemeClr val="accent1"/>
+          </a:effectRef>
+          <a:fontRef idx="minor">
+            <a:schemeClr val="lt1"/>
+          </a:fontRef>
+        </p:style>
+      </p:sp>
+      <p:sp>
+        <p:nvSpPr>
+          <p:cNvPr id="18" name="Rectangle 17"/>
+          <p:cNvSpPr/>
+          <p:nvPr/>
+        </p:nvSpPr>
+        <p:spPr>
+          <a:xfrm>
+            <a:off x="8321168" y="0"/>
+            <a:ext cx="27432" cy="6858000"/>
+          </a:xfrm>
+          <a:prstGeom prst="rect">
+            <a:avLst/>
+          </a:prstGeom>
+          <a:solidFill>
+            <a:schemeClr val="accent6"/>
+          </a:solidFill>
+          <a:ln>
+            <a:noFill/>
+          </a:ln>
+        </p:spPr>
+        <p:style>
+          <a:lnRef idx="2">
+            <a:schemeClr val="accent1">
+              <a:shade val="50000"/>
+            </a:schemeClr>
+          </a:lnRef>
+          <a:fillRef idx="1">
+            <a:schemeClr val="accent1"/>
+          </a:fillRef>
+          <a:effectRef idx="0">
+            <a:schemeClr val="accent1"/>
+          </a:effectRef>
+          <a:fontRef idx="minor">
+            <a:schemeClr val="lt1"/>
+          </a:fontRef>
+        </p:style>
+      </p:sp>
+      <p:sp>
+        <p:nvSpPr>
+          <p:cNvPr id="22" name="TextBox 21"/>
+          <p:cNvSpPr txBox="1"/>
+          <p:nvPr/>
+        </p:nvSpPr>
+        <p:spPr>
+          <a:xfrm>
+            <a:off x="1179466" y="1127642"/>
+            <a:ext cx="311727" cy="338554"/>
+          </a:xfrm>
+          <a:prstGeom prst="rect">
+            <a:avLst/>
+          </a:prstGeom>
+          <a:noFill/>
+        </p:spPr>
+        <p:txBody>
+          <a:bodyPr wrap="square" rtlCol="0">
+            <a:spAutoFit/>
+          </a:bodyPr>
+          <a:lstStyle/>
+          <a:p>
+            <a:pPr algn="r"/>
+            <a:r>
+              <a:rPr lang="en-US" sz="1600" dirty="0">
+                <a:solidFill>
+                  <a:schemeClr val="accent6"/>
+                </a:solidFill>
+                <a:latin typeface="Wingdings 3" panose="05040102010807070707" pitchFamily="18" charset="2"/>
+              </a:rPr>
+              <a:t>z</a:t>
+            </a:r>
+            <a:endParaRPr lang="en-US" sz="1600" dirty="0">
+              <a:solidFill>
+                <a:schemeClr val="accent6"/>
+              </a:solidFill>
+              <a:latin typeface="MS Shell Dlg 2" panose="020B0604030504040204" pitchFamily="34" charset="0"/>
+            </a:endParaRPr>
+          </a:p>
+        </p:txBody>
+      </p:sp>
+      <p:sp>
+        <p:nvSpPr>
+          <p:cNvPr id="2" name="Title 1"/>
+          <p:cNvSpPr>
+            <a:spLocks noGrp="1"/>
+          </p:cNvSpPr>
+          <p:nvPr>
+            <p:ph type="title"/>
+          </p:nvPr>
+        </p:nvSpPr>
+        <p:spPr>
+          <a:xfrm>
+            <a:off x="1485983" y="1296618"/>
+            <a:ext cx="2120703" cy="1889075"/>
           </a:xfrm>
         </p:spPr>
         <p:txBody>
-          <a:bodyPr anchor="b"/>
+          <a:bodyPr anchor="b">
+            <a:normAutofit/>
+          </a:bodyPr>
           <a:lstStyle>
             <a:lvl1pPr algn="l">
-              <a:defRPr sz="2000" b="1"/>
+              <a:defRPr sz="2000"/>
             </a:lvl1pPr>
           </a:lstStyle>
           <a:p>
             <a:r>
-              <a:rPr lang="en-US" smtClean="0"/>
+              <a:rPr lang="en-US"/>
               <a:t>Click to edit Master title style</a:t>
             </a:r>
-            <a:endParaRPr lang="en-US"/>
+            <a:endParaRPr lang="en-US" dirty="0"/>
           </a:p>
         </p:txBody>
       </p:sp>
@@ -2119,76 +3172,48 @@
         </p:nvSpPr>
         <p:spPr>
           <a:xfrm>
-            <a:off x="3575050" y="273050"/>
-            <a:ext cx="5111750" cy="5853113"/>
+            <a:off x="4088538" y="805818"/>
+            <a:ext cx="3755668" cy="5244126"/>
           </a:xfrm>
         </p:spPr>
         <p:txBody>
-          <a:bodyPr/>
-          <a:lstStyle>
-            <a:lvl1pPr>
-              <a:defRPr sz="3200"/>
-            </a:lvl1pPr>
-            <a:lvl2pPr>
-              <a:defRPr sz="2800"/>
-            </a:lvl2pPr>
-            <a:lvl3pPr>
-              <a:defRPr sz="2400"/>
-            </a:lvl3pPr>
-            <a:lvl4pPr>
-              <a:defRPr sz="2000"/>
-            </a:lvl4pPr>
-            <a:lvl5pPr>
-              <a:defRPr sz="2000"/>
-            </a:lvl5pPr>
-            <a:lvl6pPr>
-              <a:defRPr sz="2000"/>
-            </a:lvl6pPr>
-            <a:lvl7pPr>
-              <a:defRPr sz="2000"/>
-            </a:lvl7pPr>
-            <a:lvl8pPr>
-              <a:defRPr sz="2000"/>
-            </a:lvl8pPr>
-            <a:lvl9pPr>
-              <a:defRPr sz="2000"/>
-            </a:lvl9pPr>
-          </a:lstStyle>
+          <a:bodyPr anchor="ctr"/>
+          <a:lstStyle/>
           <a:p>
             <a:pPr lvl="0"/>
             <a:r>
-              <a:rPr lang="en-US" smtClean="0"/>
+              <a:rPr lang="en-US"/>
               <a:t>Click to edit Master text styles</a:t>
             </a:r>
           </a:p>
           <a:p>
             <a:pPr lvl="1"/>
             <a:r>
-              <a:rPr lang="en-US" smtClean="0"/>
+              <a:rPr lang="en-US"/>
               <a:t>Second level</a:t>
             </a:r>
           </a:p>
           <a:p>
             <a:pPr lvl="2"/>
             <a:r>
-              <a:rPr lang="en-US" smtClean="0"/>
+              <a:rPr lang="en-US"/>
               <a:t>Third level</a:t>
             </a:r>
           </a:p>
           <a:p>
             <a:pPr lvl="3"/>
             <a:r>
-              <a:rPr lang="en-US" smtClean="0"/>
+              <a:rPr lang="en-US"/>
               <a:t>Fourth level</a:t>
             </a:r>
           </a:p>
           <a:p>
             <a:pPr lvl="4"/>
             <a:r>
-              <a:rPr lang="en-US" smtClean="0"/>
+              <a:rPr lang="en-US"/>
               <a:t>Fifth level</a:t>
             </a:r>
-            <a:endParaRPr lang="en-US"/>
+            <a:endParaRPr lang="en-US" dirty="0"/>
           </a:p>
         </p:txBody>
       </p:sp>
@@ -2204,54 +3229,56 @@
         </p:nvSpPr>
         <p:spPr>
           <a:xfrm>
-            <a:off x="457200" y="1435100"/>
-            <a:ext cx="3008313" cy="4691063"/>
+            <a:off x="1485982" y="3186155"/>
+            <a:ext cx="2120703" cy="2386397"/>
           </a:xfrm>
         </p:spPr>
         <p:txBody>
-          <a:bodyPr/>
+          <a:bodyPr>
+            <a:normAutofit/>
+          </a:bodyPr>
           <a:lstStyle>
-            <a:lvl1pPr marL="0" indent="0">
+            <a:lvl1pPr marL="0" indent="0" algn="l">
               <a:buNone/>
               <a:defRPr sz="1400"/>
             </a:lvl1pPr>
-            <a:lvl2pPr marL="457200" indent="0">
+            <a:lvl2pPr marL="342900" indent="0">
               <a:buNone/>
-              <a:defRPr sz="1200"/>
+              <a:defRPr sz="1050"/>
             </a:lvl2pPr>
-            <a:lvl3pPr marL="914400" indent="0">
-              <a:buNone/>
-              <a:defRPr sz="1000"/>
-            </a:lvl3pPr>
-            <a:lvl4pPr marL="1371600" indent="0">
+            <a:lvl3pPr marL="685800" indent="0">
               <a:buNone/>
               <a:defRPr sz="900"/>
+            </a:lvl3pPr>
+            <a:lvl4pPr marL="1028700" indent="0">
+              <a:buNone/>
+              <a:defRPr sz="750"/>
             </a:lvl4pPr>
-            <a:lvl5pPr marL="1828800" indent="0">
+            <a:lvl5pPr marL="1371600" indent="0">
               <a:buNone/>
-              <a:defRPr sz="900"/>
+              <a:defRPr sz="750"/>
             </a:lvl5pPr>
-            <a:lvl6pPr marL="2286000" indent="0">
+            <a:lvl6pPr marL="1714500" indent="0">
               <a:buNone/>
-              <a:defRPr sz="900"/>
+              <a:defRPr sz="750"/>
             </a:lvl6pPr>
-            <a:lvl7pPr marL="2743200" indent="0">
+            <a:lvl7pPr marL="2057400" indent="0">
               <a:buNone/>
-              <a:defRPr sz="900"/>
+              <a:defRPr sz="750"/>
             </a:lvl7pPr>
-            <a:lvl8pPr marL="3200400" indent="0">
+            <a:lvl8pPr marL="2400300" indent="0">
               <a:buNone/>
-              <a:defRPr sz="900"/>
+              <a:defRPr sz="750"/>
             </a:lvl8pPr>
-            <a:lvl9pPr marL="3657600" indent="0">
+            <a:lvl9pPr marL="2743200" indent="0">
               <a:buNone/>
-              <a:defRPr sz="900"/>
+              <a:defRPr sz="750"/>
             </a:lvl9pPr>
           </a:lstStyle>
           <a:p>
             <a:pPr lvl="0"/>
             <a:r>
-              <a:rPr lang="en-US" smtClean="0"/>
+              <a:rPr lang="en-US"/>
               <a:t>Click to edit Master text styles</a:t>
             </a:r>
           </a:p>
@@ -2274,7 +3301,7 @@
           <a:p>
             <a:fld id="{5BCAD085-E8A6-8845-BD4E-CB4CCA059FC4}" type="datetimeFigureOut">
               <a:rPr lang="en-US" smtClean="0"/>
-              <a:t>1/27/13</a:t>
+              <a:t>9/26/25</a:t>
             </a:fld>
             <a:endParaRPr lang="en-US"/>
           </a:p>
@@ -2325,7 +3352,7 @@
     </p:spTree>
     <p:extLst>
       <p:ext uri="{BB962C8B-B14F-4D97-AF65-F5344CB8AC3E}">
-        <p14:creationId xmlns:p14="http://schemas.microsoft.com/office/powerpoint/2010/main" val="1840726560"/>
+        <p14:creationId xmlns:p14="http://schemas.microsoft.com/office/powerpoint/2010/main" val="3177373431"/>
       </p:ext>
     </p:extLst>
   </p:cSld>
@@ -2354,157 +3381,308 @@
       </p:grpSpPr>
       <p:sp>
         <p:nvSpPr>
-          <p:cNvPr id="2" name="Title 1"/>
-          <p:cNvSpPr>
-            <a:spLocks noGrp="1"/>
-          </p:cNvSpPr>
-          <p:nvPr>
-            <p:ph type="title"/>
-          </p:nvPr>
+          <p:cNvPr id="11" name="Rectangle 10"/>
+          <p:cNvSpPr/>
+          <p:nvPr/>
         </p:nvSpPr>
         <p:spPr>
           <a:xfrm>
-            <a:off x="1792288" y="4800600"/>
-            <a:ext cx="5486400" cy="566738"/>
+            <a:off x="1007534" y="0"/>
+            <a:ext cx="7315560" cy="6858000"/>
+          </a:xfrm>
+          <a:prstGeom prst="rect">
+            <a:avLst/>
+          </a:prstGeom>
+          <a:solidFill>
+            <a:schemeClr val="bg2">
+              <a:alpha val="92000"/>
+            </a:schemeClr>
+          </a:solidFill>
+          <a:ln>
+            <a:noFill/>
+          </a:ln>
+        </p:spPr>
+        <p:style>
+          <a:lnRef idx="2">
+            <a:schemeClr val="accent1">
+              <a:shade val="50000"/>
+            </a:schemeClr>
+          </a:lnRef>
+          <a:fillRef idx="1">
+            <a:schemeClr val="accent1"/>
+          </a:fillRef>
+          <a:effectRef idx="0">
+            <a:schemeClr val="accent1"/>
+          </a:effectRef>
+          <a:fontRef idx="minor">
+            <a:schemeClr val="lt1"/>
+          </a:fontRef>
+        </p:style>
+      </p:sp>
+      <p:sp>
+        <p:nvSpPr>
+          <p:cNvPr id="12" name="Rectangle 11"/>
+          <p:cNvSpPr/>
+          <p:nvPr/>
+        </p:nvSpPr>
+        <p:spPr>
+          <a:xfrm>
+            <a:off x="8321168" y="0"/>
+            <a:ext cx="27432" cy="6858000"/>
+          </a:xfrm>
+          <a:prstGeom prst="rect">
+            <a:avLst/>
+          </a:prstGeom>
+          <a:solidFill>
+            <a:schemeClr val="accent6"/>
+          </a:solidFill>
+          <a:ln>
+            <a:noFill/>
+          </a:ln>
+        </p:spPr>
+        <p:style>
+          <a:lnRef idx="2">
+            <a:schemeClr val="accent1">
+              <a:shade val="50000"/>
+            </a:schemeClr>
+          </a:lnRef>
+          <a:fillRef idx="1">
+            <a:schemeClr val="accent1"/>
+          </a:fillRef>
+          <a:effectRef idx="0">
+            <a:schemeClr val="accent1"/>
+          </a:effectRef>
+          <a:fontRef idx="minor">
+            <a:schemeClr val="lt1"/>
+          </a:fontRef>
+        </p:style>
+      </p:sp>
+      <p:sp>
+        <p:nvSpPr>
+          <p:cNvPr id="13" name="TextBox 12"/>
+          <p:cNvSpPr txBox="1"/>
+          <p:nvPr/>
+        </p:nvSpPr>
+        <p:spPr>
+          <a:xfrm>
+            <a:off x="1179466" y="1127642"/>
+            <a:ext cx="311727" cy="338554"/>
+          </a:xfrm>
+          <a:prstGeom prst="rect">
+            <a:avLst/>
+          </a:prstGeom>
+          <a:noFill/>
+        </p:spPr>
+        <p:txBody>
+          <a:bodyPr wrap="square" rtlCol="0">
+            <a:spAutoFit/>
+          </a:bodyPr>
+          <a:lstStyle/>
+          <a:p>
+            <a:pPr algn="r"/>
+            <a:r>
+              <a:rPr lang="en-US" sz="1600" dirty="0">
+                <a:solidFill>
+                  <a:schemeClr val="accent6"/>
+                </a:solidFill>
+                <a:latin typeface="Wingdings 3" panose="05040102010807070707" pitchFamily="18" charset="2"/>
+              </a:rPr>
+              <a:t>z</a:t>
+            </a:r>
+            <a:endParaRPr lang="en-US" sz="1600" dirty="0">
+              <a:solidFill>
+                <a:schemeClr val="accent6"/>
+              </a:solidFill>
+              <a:latin typeface="MS Shell Dlg 2" panose="020B0604030504040204" pitchFamily="34" charset="0"/>
+            </a:endParaRPr>
+          </a:p>
+        </p:txBody>
+      </p:sp>
+      <p:sp>
+        <p:nvSpPr>
+          <p:cNvPr id="3" name="Picture Placeholder 2"/>
+          <p:cNvSpPr>
+            <a:spLocks noGrp="1" noChangeAspect="1"/>
+          </p:cNvSpPr>
+          <p:nvPr>
+            <p:ph type="pic" idx="1"/>
+          </p:nvPr>
+        </p:nvSpPr>
+        <p:spPr>
+          <a:xfrm>
+            <a:off x="4582987" y="3229"/>
+            <a:ext cx="3727769" cy="6858000"/>
+          </a:xfrm>
+          <a:solidFill>
+            <a:schemeClr val="tx1">
+              <a:alpha val="10000"/>
+            </a:schemeClr>
+          </a:solidFill>
+          <a:ln w="9525" cap="sq">
+            <a:noFill/>
+            <a:miter lim="800000"/>
+          </a:ln>
+          <a:effectLst/>
+          <a:scene3d>
+            <a:camera prst="orthographicFront"/>
+            <a:lightRig rig="twoPt" dir="t">
+              <a:rot lat="0" lon="0" rev="7200000"/>
+            </a:lightRig>
+          </a:scene3d>
+          <a:sp3d>
+            <a:bevelT w="25400" h="19050"/>
+            <a:contourClr>
+              <a:srgbClr val="FFFFFF"/>
+            </a:contourClr>
+          </a:sp3d>
+        </p:spPr>
+        <p:txBody>
+          <a:bodyPr anchor="t">
+            <a:normAutofit/>
+          </a:bodyPr>
+          <a:lstStyle>
+            <a:lvl1pPr marL="0" indent="0" algn="ctr">
+              <a:buNone/>
+              <a:defRPr sz="2100"/>
+            </a:lvl1pPr>
+            <a:lvl2pPr marL="342900" indent="0">
+              <a:buNone/>
+              <a:defRPr sz="2100"/>
+            </a:lvl2pPr>
+            <a:lvl3pPr marL="685800" indent="0">
+              <a:buNone/>
+              <a:defRPr sz="1800"/>
+            </a:lvl3pPr>
+            <a:lvl4pPr marL="1028700" indent="0">
+              <a:buNone/>
+              <a:defRPr sz="1500"/>
+            </a:lvl4pPr>
+            <a:lvl5pPr marL="1371600" indent="0">
+              <a:buNone/>
+              <a:defRPr sz="1500"/>
+            </a:lvl5pPr>
+            <a:lvl6pPr marL="1714500" indent="0">
+              <a:buNone/>
+              <a:defRPr sz="1500"/>
+            </a:lvl6pPr>
+            <a:lvl7pPr marL="2057400" indent="0">
+              <a:buNone/>
+              <a:defRPr sz="1500"/>
+            </a:lvl7pPr>
+            <a:lvl8pPr marL="2400300" indent="0">
+              <a:buNone/>
+              <a:defRPr sz="1500"/>
+            </a:lvl8pPr>
+            <a:lvl9pPr marL="2743200" indent="0">
+              <a:buNone/>
+              <a:defRPr sz="1500"/>
+            </a:lvl9pPr>
+          </a:lstStyle>
+          <a:p>
+            <a:r>
+              <a:rPr lang="en-US"/>
+              <a:t>Click icon to add picture</a:t>
+            </a:r>
+            <a:endParaRPr lang="en-US" dirty="0"/>
+          </a:p>
+        </p:txBody>
+      </p:sp>
+      <p:sp>
+        <p:nvSpPr>
+          <p:cNvPr id="2" name="Title 1"/>
+          <p:cNvSpPr>
+            <a:spLocks noGrp="1"/>
+          </p:cNvSpPr>
+          <p:nvPr>
+            <p:ph type="title"/>
+          </p:nvPr>
+        </p:nvSpPr>
+        <p:spPr>
+          <a:xfrm>
+            <a:off x="1486671" y="1296618"/>
+            <a:ext cx="2603212" cy="1886308"/>
           </a:xfrm>
         </p:spPr>
         <p:txBody>
-          <a:bodyPr anchor="b"/>
+          <a:bodyPr anchor="b">
+            <a:normAutofit/>
+          </a:bodyPr>
           <a:lstStyle>
             <a:lvl1pPr algn="l">
-              <a:defRPr sz="2000" b="1"/>
+              <a:defRPr sz="2400"/>
             </a:lvl1pPr>
           </a:lstStyle>
           <a:p>
             <a:r>
-              <a:rPr lang="en-US" smtClean="0"/>
+              <a:rPr lang="en-US"/>
               <a:t>Click to edit Master title style</a:t>
             </a:r>
-            <a:endParaRPr lang="en-US"/>
-          </a:p>
-        </p:txBody>
-      </p:sp>
-      <p:sp>
-        <p:nvSpPr>
-          <p:cNvPr id="3" name="Picture Placeholder 2"/>
-          <p:cNvSpPr>
-            <a:spLocks noGrp="1"/>
-          </p:cNvSpPr>
-          <p:nvPr>
-            <p:ph type="pic" idx="1"/>
+            <a:endParaRPr lang="en-US" dirty="0"/>
+          </a:p>
+        </p:txBody>
+      </p:sp>
+      <p:sp>
+        <p:nvSpPr>
+          <p:cNvPr id="4" name="Text Placeholder 3"/>
+          <p:cNvSpPr>
+            <a:spLocks noGrp="1"/>
+          </p:cNvSpPr>
+          <p:nvPr>
+            <p:ph type="body" sz="half" idx="2"/>
           </p:nvPr>
         </p:nvSpPr>
         <p:spPr>
           <a:xfrm>
-            <a:off x="1792288" y="612775"/>
-            <a:ext cx="5486400" cy="4114800"/>
+            <a:off x="1485984" y="3182928"/>
+            <a:ext cx="2603794" cy="2386394"/>
           </a:xfrm>
         </p:spPr>
         <p:txBody>
-          <a:bodyPr/>
+          <a:bodyPr>
+            <a:normAutofit/>
+          </a:bodyPr>
           <a:lstStyle>
-            <a:lvl1pPr marL="0" indent="0">
+            <a:lvl1pPr marL="0" indent="0" algn="l">
               <a:buNone/>
-              <a:defRPr sz="3200"/>
+              <a:defRPr sz="1600"/>
             </a:lvl1pPr>
-            <a:lvl2pPr marL="457200" indent="0">
+            <a:lvl2pPr marL="342900" indent="0">
               <a:buNone/>
-              <a:defRPr sz="2800"/>
+              <a:defRPr sz="1050"/>
             </a:lvl2pPr>
-            <a:lvl3pPr marL="914400" indent="0">
+            <a:lvl3pPr marL="685800" indent="0">
               <a:buNone/>
-              <a:defRPr sz="2400"/>
+              <a:defRPr sz="900"/>
             </a:lvl3pPr>
-            <a:lvl4pPr marL="1371600" indent="0">
+            <a:lvl4pPr marL="1028700" indent="0">
               <a:buNone/>
-              <a:defRPr sz="2000"/>
+              <a:defRPr sz="750"/>
             </a:lvl4pPr>
-            <a:lvl5pPr marL="1828800" indent="0">
+            <a:lvl5pPr marL="1371600" indent="0">
               <a:buNone/>
-              <a:defRPr sz="2000"/>
+              <a:defRPr sz="750"/>
             </a:lvl5pPr>
-            <a:lvl6pPr marL="2286000" indent="0">
+            <a:lvl6pPr marL="1714500" indent="0">
               <a:buNone/>
-              <a:defRPr sz="2000"/>
+              <a:defRPr sz="750"/>
             </a:lvl6pPr>
-            <a:lvl7pPr marL="2743200" indent="0">
+            <a:lvl7pPr marL="2057400" indent="0">
               <a:buNone/>
-              <a:defRPr sz="2000"/>
+              <a:defRPr sz="750"/>
             </a:lvl7pPr>
-            <a:lvl8pPr marL="3200400" indent="0">
+            <a:lvl8pPr marL="2400300" indent="0">
               <a:buNone/>
-              <a:defRPr sz="2000"/>
+              <a:defRPr sz="750"/>
             </a:lvl8pPr>
-            <a:lvl9pPr marL="3657600" indent="0">
+            <a:lvl9pPr marL="2743200" indent="0">
               <a:buNone/>
-              <a:defRPr sz="2000"/>
+              <a:defRPr sz="750"/>
             </a:lvl9pPr>
           </a:lstStyle>
           <a:p>
-            <a:endParaRPr lang="en-US"/>
-          </a:p>
-        </p:txBody>
-      </p:sp>
-      <p:sp>
-        <p:nvSpPr>
-          <p:cNvPr id="4" name="Text Placeholder 3"/>
-          <p:cNvSpPr>
-            <a:spLocks noGrp="1"/>
-          </p:cNvSpPr>
-          <p:nvPr>
-            <p:ph type="body" sz="half" idx="2"/>
-          </p:nvPr>
-        </p:nvSpPr>
-        <p:spPr>
-          <a:xfrm>
-            <a:off x="1792288" y="5367338"/>
-            <a:ext cx="5486400" cy="804862"/>
-          </a:xfrm>
-        </p:spPr>
-        <p:txBody>
-          <a:bodyPr/>
-          <a:lstStyle>
-            <a:lvl1pPr marL="0" indent="0">
-              <a:buNone/>
-              <a:defRPr sz="1400"/>
-            </a:lvl1pPr>
-            <a:lvl2pPr marL="457200" indent="0">
-              <a:buNone/>
-              <a:defRPr sz="1200"/>
-            </a:lvl2pPr>
-            <a:lvl3pPr marL="914400" indent="0">
-              <a:buNone/>
-              <a:defRPr sz="1000"/>
-            </a:lvl3pPr>
-            <a:lvl4pPr marL="1371600" indent="0">
-              <a:buNone/>
-              <a:defRPr sz="900"/>
-            </a:lvl4pPr>
-            <a:lvl5pPr marL="1828800" indent="0">
-              <a:buNone/>
-              <a:defRPr sz="900"/>
-            </a:lvl5pPr>
-            <a:lvl6pPr marL="2286000" indent="0">
-              <a:buNone/>
-              <a:defRPr sz="900"/>
-            </a:lvl6pPr>
-            <a:lvl7pPr marL="2743200" indent="0">
-              <a:buNone/>
-              <a:defRPr sz="900"/>
-            </a:lvl7pPr>
-            <a:lvl8pPr marL="3200400" indent="0">
-              <a:buNone/>
-              <a:defRPr sz="900"/>
-            </a:lvl8pPr>
-            <a:lvl9pPr marL="3657600" indent="0">
-              <a:buNone/>
-              <a:defRPr sz="900"/>
-            </a:lvl9pPr>
-          </a:lstStyle>
-          <a:p>
             <a:pPr lvl="0"/>
             <a:r>
-              <a:rPr lang="en-US" smtClean="0"/>
+              <a:rPr lang="en-US"/>
               <a:t>Click to edit Master text styles</a:t>
             </a:r>
           </a:p>
@@ -2527,7 +3705,7 @@
           <a:p>
             <a:fld id="{5BCAD085-E8A6-8845-BD4E-CB4CCA059FC4}" type="datetimeFigureOut">
               <a:rPr lang="en-US" smtClean="0"/>
-              <a:t>1/27/13</a:t>
+              <a:t>9/26/25</a:t>
             </a:fld>
             <a:endParaRPr lang="en-US"/>
           </a:p>
@@ -2578,7 +3756,7 @@
     </p:spTree>
     <p:extLst>
       <p:ext uri="{BB962C8B-B14F-4D97-AF65-F5344CB8AC3E}">
-        <p14:creationId xmlns:p14="http://schemas.microsoft.com/office/powerpoint/2010/main" val="3889236939"/>
+        <p14:creationId xmlns:p14="http://schemas.microsoft.com/office/powerpoint/2010/main" val="3377849485"/>
       </p:ext>
     </p:extLst>
   </p:cSld>
@@ -2592,7 +3770,7 @@
 <p:sldMaster xmlns:a="http://schemas.openxmlformats.org/drawingml/2006/main" xmlns:r="http://schemas.openxmlformats.org/officeDocument/2006/relationships" xmlns:p="http://schemas.openxmlformats.org/presentationml/2006/main">
   <p:cSld>
     <p:bg>
-      <p:bgRef idx="1001">
+      <p:bgRef idx="1003">
         <a:schemeClr val="bg1"/>
       </p:bgRef>
     </p:bg>
@@ -2610,125 +3788,302 @@
           <a:chExt cx="0" cy="0"/>
         </a:xfrm>
       </p:grpSpPr>
-      <p:sp>
-        <p:nvSpPr>
-          <p:cNvPr id="2" name="Title Placeholder 1"/>
-          <p:cNvSpPr>
-            <a:spLocks noGrp="1"/>
-          </p:cNvSpPr>
-          <p:nvPr>
-            <p:ph type="title"/>
-          </p:nvPr>
-        </p:nvSpPr>
+      <p:pic>
+        <p:nvPicPr>
+          <p:cNvPr id="18" name="Picture 17"/>
+          <p:cNvPicPr>
+            <a:picLocks noChangeAspect="1"/>
+          </p:cNvPicPr>
+          <p:nvPr/>
+        </p:nvPicPr>
+        <p:blipFill>
+          <a:blip r:embed="rId13">
+            <a:extLst>
+              <a:ext uri="{28A0092B-C50C-407E-A947-70E740481C1C}">
+                <a14:useLocalDpi xmlns:a14="http://schemas.microsoft.com/office/drawing/2010/main" val="0"/>
+              </a:ext>
+            </a:extLst>
+          </a:blip>
+          <a:stretch>
+            <a:fillRect/>
+          </a:stretch>
+        </p:blipFill>
         <p:spPr>
           <a:xfrm>
-            <a:off x="457200" y="274638"/>
-            <a:ext cx="8229600" cy="1143000"/>
+            <a:off x="1371060" y="2912532"/>
+            <a:ext cx="7772939" cy="3945467"/>
           </a:xfrm>
           <a:prstGeom prst="rect">
             <a:avLst/>
           </a:prstGeom>
         </p:spPr>
-        <p:txBody>
-          <a:bodyPr vert="horz" lIns="91440" tIns="45720" rIns="91440" bIns="45720" rtlCol="0" anchor="ctr">
-            <a:normAutofit/>
-          </a:bodyPr>
-          <a:lstStyle/>
-          <a:p>
-            <a:r>
-              <a:rPr lang="en-US" smtClean="0"/>
-              <a:t>Click to edit Master title style</a:t>
-            </a:r>
-            <a:endParaRPr lang="en-US"/>
-          </a:p>
-        </p:txBody>
-      </p:sp>
-      <p:sp>
-        <p:nvSpPr>
-          <p:cNvPr id="3" name="Text Placeholder 2"/>
-          <p:cNvSpPr>
-            <a:spLocks noGrp="1"/>
-          </p:cNvSpPr>
-          <p:nvPr>
-            <p:ph type="body" idx="1"/>
-          </p:nvPr>
-        </p:nvSpPr>
+      </p:pic>
+      <p:pic>
+        <p:nvPicPr>
+          <p:cNvPr id="15" name="Picture 14"/>
+          <p:cNvPicPr>
+            <a:picLocks noChangeAspect="1"/>
+          </p:cNvPicPr>
+          <p:nvPr/>
+        </p:nvPicPr>
+        <p:blipFill rotWithShape="1">
+          <a:blip r:embed="rId14">
+            <a:extLst>
+              <a:ext uri="{28A0092B-C50C-407E-A947-70E740481C1C}">
+                <a14:useLocalDpi xmlns:a14="http://schemas.microsoft.com/office/drawing/2010/main" val="0"/>
+              </a:ext>
+            </a:extLst>
+          </a:blip>
+          <a:srcRect r="24998"/>
+          <a:stretch/>
+        </p:blipFill>
         <p:spPr>
           <a:xfrm>
-            <a:off x="457200" y="1600200"/>
-            <a:ext cx="8229600" cy="4525963"/>
+            <a:off x="1" y="0"/>
+            <a:ext cx="9143999" cy="6858000"/>
           </a:xfrm>
           <a:prstGeom prst="rect">
             <a:avLst/>
           </a:prstGeom>
         </p:spPr>
-        <p:txBody>
-          <a:bodyPr vert="horz" lIns="91440" tIns="45720" rIns="91440" bIns="45720" rtlCol="0">
-            <a:normAutofit/>
-          </a:bodyPr>
-          <a:lstStyle/>
-          <a:p>
-            <a:pPr lvl="0"/>
-            <a:r>
-              <a:rPr lang="en-US" smtClean="0"/>
-              <a:t>Click to edit Master text styles</a:t>
-            </a:r>
-          </a:p>
-          <a:p>
-            <a:pPr lvl="1"/>
-            <a:r>
-              <a:rPr lang="en-US" smtClean="0"/>
-              <a:t>Second level</a:t>
-            </a:r>
-          </a:p>
-          <a:p>
-            <a:pPr lvl="2"/>
-            <a:r>
-              <a:rPr lang="en-US" smtClean="0"/>
-              <a:t>Third level</a:t>
-            </a:r>
-          </a:p>
-          <a:p>
-            <a:pPr lvl="3"/>
-            <a:r>
-              <a:rPr lang="en-US" smtClean="0"/>
-              <a:t>Fourth level</a:t>
-            </a:r>
-          </a:p>
-          <a:p>
-            <a:pPr lvl="4"/>
-            <a:r>
-              <a:rPr lang="en-US" smtClean="0"/>
-              <a:t>Fifth level</a:t>
-            </a:r>
-            <a:endParaRPr lang="en-US"/>
-          </a:p>
-        </p:txBody>
-      </p:sp>
-      <p:sp>
-        <p:nvSpPr>
-          <p:cNvPr id="4" name="Date Placeholder 3"/>
-          <p:cNvSpPr>
-            <a:spLocks noGrp="1"/>
-          </p:cNvSpPr>
-          <p:nvPr>
-            <p:ph type="dt" sz="half" idx="2"/>
-          </p:nvPr>
+      </p:pic>
+      <p:sp>
+        <p:nvSpPr>
+          <p:cNvPr id="12" name="Rectangle 11"/>
+          <p:cNvSpPr/>
+          <p:nvPr/>
         </p:nvSpPr>
         <p:spPr>
           <a:xfrm>
-            <a:off x="457200" y="6356350"/>
-            <a:ext cx="2133600" cy="365125"/>
+            <a:off x="0" y="0"/>
+            <a:ext cx="964174" cy="6858000"/>
+          </a:xfrm>
+          <a:prstGeom prst="rect">
+            <a:avLst/>
+          </a:prstGeom>
+          <a:solidFill>
+            <a:schemeClr val="bg2"/>
+          </a:solidFill>
+          <a:ln>
+            <a:noFill/>
+          </a:ln>
+        </p:spPr>
+        <p:style>
+          <a:lnRef idx="2">
+            <a:schemeClr val="accent1">
+              <a:shade val="50000"/>
+            </a:schemeClr>
+          </a:lnRef>
+          <a:fillRef idx="1">
+            <a:schemeClr val="accent1"/>
+          </a:fillRef>
+          <a:effectRef idx="0">
+            <a:schemeClr val="accent1"/>
+          </a:effectRef>
+          <a:fontRef idx="minor">
+            <a:schemeClr val="lt1"/>
+          </a:fontRef>
+        </p:style>
+      </p:sp>
+      <p:sp>
+        <p:nvSpPr>
+          <p:cNvPr id="13" name="Rectangle 12"/>
+          <p:cNvSpPr/>
+          <p:nvPr/>
+        </p:nvSpPr>
+        <p:spPr>
+          <a:xfrm>
+            <a:off x="962042" y="0"/>
+            <a:ext cx="45719" cy="6858000"/>
+          </a:xfrm>
+          <a:prstGeom prst="rect">
+            <a:avLst/>
+          </a:prstGeom>
+          <a:solidFill>
+            <a:schemeClr val="accent6"/>
+          </a:solidFill>
+          <a:ln>
+            <a:noFill/>
+          </a:ln>
+        </p:spPr>
+        <p:style>
+          <a:lnRef idx="2">
+            <a:schemeClr val="accent1">
+              <a:shade val="50000"/>
+            </a:schemeClr>
+          </a:lnRef>
+          <a:fillRef idx="1">
+            <a:schemeClr val="accent1"/>
+          </a:fillRef>
+          <a:effectRef idx="0">
+            <a:schemeClr val="accent1"/>
+          </a:effectRef>
+          <a:fontRef idx="minor">
+            <a:schemeClr val="lt1"/>
+          </a:fontRef>
+        </p:style>
+      </p:sp>
+      <p:sp>
+        <p:nvSpPr>
+          <p:cNvPr id="2" name="Title Placeholder 1"/>
+          <p:cNvSpPr>
+            <a:spLocks noGrp="1"/>
+          </p:cNvSpPr>
+          <p:nvPr>
+            <p:ph type="title"/>
+          </p:nvPr>
+        </p:nvSpPr>
+        <p:spPr>
+          <a:xfrm>
+            <a:off x="1961317" y="808057"/>
+            <a:ext cx="5878011" cy="1077229"/>
           </a:xfrm>
           <a:prstGeom prst="rect">
             <a:avLst/>
           </a:prstGeom>
         </p:spPr>
         <p:txBody>
-          <a:bodyPr vert="horz" lIns="91440" tIns="45720" rIns="91440" bIns="45720" rtlCol="0" anchor="ctr"/>
+          <a:bodyPr vert="horz" lIns="91440" tIns="45720" rIns="91440" bIns="45720" rtlCol="0" anchor="t">
+            <a:normAutofit/>
+          </a:bodyPr>
+          <a:lstStyle/>
+          <a:p>
+            <a:r>
+              <a:rPr lang="en-US"/>
+              <a:t>Click to edit Master title style</a:t>
+            </a:r>
+            <a:endParaRPr lang="en-US" dirty="0"/>
+          </a:p>
+        </p:txBody>
+      </p:sp>
+      <p:sp>
+        <p:nvSpPr>
+          <p:cNvPr id="3" name="Text Placeholder 2"/>
+          <p:cNvSpPr>
+            <a:spLocks noGrp="1"/>
+          </p:cNvSpPr>
+          <p:nvPr>
+            <p:ph type="body" idx="1"/>
+          </p:nvPr>
+        </p:nvSpPr>
+        <p:spPr>
+          <a:xfrm>
+            <a:off x="2126236" y="2049878"/>
+            <a:ext cx="5713092" cy="4000066"/>
+          </a:xfrm>
+          <a:prstGeom prst="rect">
+            <a:avLst/>
+          </a:prstGeom>
+        </p:spPr>
+        <p:txBody>
+          <a:bodyPr vert="horz" lIns="91440" tIns="45720" rIns="91440" bIns="45720" rtlCol="0">
+            <a:normAutofit/>
+          </a:bodyPr>
+          <a:lstStyle/>
+          <a:p>
+            <a:pPr lvl="0"/>
+            <a:r>
+              <a:rPr lang="en-US"/>
+              <a:t>Click to edit Master text styles</a:t>
+            </a:r>
+          </a:p>
+          <a:p>
+            <a:pPr lvl="1"/>
+            <a:r>
+              <a:rPr lang="en-US"/>
+              <a:t>Second level</a:t>
+            </a:r>
+          </a:p>
+          <a:p>
+            <a:pPr lvl="2"/>
+            <a:r>
+              <a:rPr lang="en-US"/>
+              <a:t>Third level</a:t>
+            </a:r>
+          </a:p>
+          <a:p>
+            <a:pPr lvl="3"/>
+            <a:r>
+              <a:rPr lang="en-US"/>
+              <a:t>Fourth level</a:t>
+            </a:r>
+          </a:p>
+          <a:p>
+            <a:pPr lvl="4"/>
+            <a:r>
+              <a:rPr lang="en-US"/>
+              <a:t>Fifth level</a:t>
+            </a:r>
+            <a:endParaRPr lang="en-US" dirty="0"/>
+          </a:p>
+        </p:txBody>
+      </p:sp>
+      <p:sp>
+        <p:nvSpPr>
+          <p:cNvPr id="4" name="Date Placeholder 3"/>
+          <p:cNvSpPr>
+            <a:spLocks noGrp="1"/>
+          </p:cNvSpPr>
+          <p:nvPr>
+            <p:ph type="dt" sz="half" idx="2"/>
+          </p:nvPr>
+        </p:nvSpPr>
+        <p:spPr>
+          <a:xfrm rot="5400000">
+            <a:off x="-828294" y="5272451"/>
+            <a:ext cx="2662729" cy="179188"/>
+          </a:xfrm>
+          <a:prstGeom prst="rect">
+            <a:avLst/>
+          </a:prstGeom>
+        </p:spPr>
+        <p:txBody>
+          <a:bodyPr vert="horz" lIns="91440" tIns="18288" rIns="91440" bIns="45720" rtlCol="0" anchor="t"/>
           <a:lstStyle>
-            <a:lvl1pPr algn="l">
-              <a:defRPr sz="1200">
+            <a:lvl1pPr algn="r">
+              <a:defRPr sz="900">
+                <a:solidFill>
+                  <a:schemeClr val="tx1">
+                    <a:tint val="75000"/>
+                  </a:schemeClr>
+                </a:solidFill>
+                <a:latin typeface="+mn-lt"/>
+              </a:defRPr>
+            </a:lvl1pPr>
+          </a:lstStyle>
+          <a:p>
+            <a:fld id="{5BCAD085-E8A6-8845-BD4E-CB4CCA059FC4}" type="datetimeFigureOut">
+              <a:rPr lang="en-US" smtClean="0"/>
+              <a:t>9/26/25</a:t>
+            </a:fld>
+            <a:endParaRPr lang="en-US"/>
+          </a:p>
+        </p:txBody>
+      </p:sp>
+      <p:sp>
+        <p:nvSpPr>
+          <p:cNvPr id="5" name="Footer Placeholder 4"/>
+          <p:cNvSpPr>
+            <a:spLocks noGrp="1"/>
+          </p:cNvSpPr>
+          <p:nvPr>
+            <p:ph type="ftr" sz="quarter" idx="3"/>
+          </p:nvPr>
+        </p:nvSpPr>
+        <p:spPr>
+          <a:xfrm rot="5400000">
+            <a:off x="-2258177" y="3658900"/>
+            <a:ext cx="5885352" cy="183663"/>
+          </a:xfrm>
+          <a:prstGeom prst="rect">
+            <a:avLst/>
+          </a:prstGeom>
+        </p:spPr>
+        <p:txBody>
+          <a:bodyPr vert="horz" lIns="91440" tIns="45720" rIns="91440" bIns="18288" rtlCol="0" anchor="b"/>
+          <a:lstStyle>
+            <a:lvl1pPr algn="r">
+              <a:defRPr sz="900">
                 <a:solidFill>
                   <a:schemeClr val="tx1">
                     <a:tint val="75000"/>
@@ -2738,38 +4093,34 @@
             </a:lvl1pPr>
           </a:lstStyle>
           <a:p>
-            <a:fld id="{5BCAD085-E8A6-8845-BD4E-CB4CCA059FC4}" type="datetimeFigureOut">
-              <a:rPr lang="en-US" smtClean="0"/>
-              <a:t>1/27/13</a:t>
-            </a:fld>
             <a:endParaRPr lang="en-US"/>
           </a:p>
         </p:txBody>
       </p:sp>
       <p:sp>
         <p:nvSpPr>
-          <p:cNvPr id="5" name="Footer Placeholder 4"/>
-          <p:cNvSpPr>
-            <a:spLocks noGrp="1"/>
-          </p:cNvSpPr>
-          <p:nvPr>
-            <p:ph type="ftr" sz="quarter" idx="3"/>
+          <p:cNvPr id="6" name="Slide Number Placeholder 5"/>
+          <p:cNvSpPr>
+            <a:spLocks noGrp="1"/>
+          </p:cNvSpPr>
+          <p:nvPr>
+            <p:ph type="sldNum" sz="quarter" idx="4"/>
           </p:nvPr>
         </p:nvSpPr>
         <p:spPr>
           <a:xfrm>
-            <a:off x="3124200" y="6356350"/>
-            <a:ext cx="2895600" cy="365125"/>
+            <a:off x="162136" y="164594"/>
+            <a:ext cx="638312" cy="322850"/>
           </a:xfrm>
           <a:prstGeom prst="rect">
             <a:avLst/>
           </a:prstGeom>
         </p:spPr>
         <p:txBody>
-          <a:bodyPr vert="horz" lIns="91440" tIns="45720" rIns="91440" bIns="45720" rtlCol="0" anchor="ctr"/>
+          <a:bodyPr vert="horz" lIns="91440" tIns="45720" rIns="45720" bIns="45720" rtlCol="0" anchor="ctr"/>
           <a:lstStyle>
-            <a:lvl1pPr algn="ctr">
-              <a:defRPr sz="1200">
+            <a:lvl1pPr algn="r">
+              <a:defRPr sz="1600">
                 <a:solidFill>
                   <a:schemeClr val="tx1">
                     <a:tint val="75000"/>
@@ -2779,43 +4130,6 @@
             </a:lvl1pPr>
           </a:lstStyle>
           <a:p>
-            <a:endParaRPr lang="en-US"/>
-          </a:p>
-        </p:txBody>
-      </p:sp>
-      <p:sp>
-        <p:nvSpPr>
-          <p:cNvPr id="6" name="Slide Number Placeholder 5"/>
-          <p:cNvSpPr>
-            <a:spLocks noGrp="1"/>
-          </p:cNvSpPr>
-          <p:nvPr>
-            <p:ph type="sldNum" sz="quarter" idx="4"/>
-          </p:nvPr>
-        </p:nvSpPr>
-        <p:spPr>
-          <a:xfrm>
-            <a:off x="6553200" y="6356350"/>
-            <a:ext cx="2133600" cy="365125"/>
-          </a:xfrm>
-          <a:prstGeom prst="rect">
-            <a:avLst/>
-          </a:prstGeom>
-        </p:spPr>
-        <p:txBody>
-          <a:bodyPr vert="horz" lIns="91440" tIns="45720" rIns="91440" bIns="45720" rtlCol="0" anchor="ctr"/>
-          <a:lstStyle>
-            <a:lvl1pPr algn="r">
-              <a:defRPr sz="1200">
-                <a:solidFill>
-                  <a:schemeClr val="tx1">
-                    <a:tint val="75000"/>
-                  </a:schemeClr>
-                </a:solidFill>
-              </a:defRPr>
-            </a:lvl1pPr>
-          </a:lstStyle>
-          <a:p>
             <a:fld id="{C1FF6DA9-008F-8B48-92A6-B652298478BF}" type="slidenum">
               <a:rPr lang="en-US" smtClean="0"/>
               <a:t>‹#›</a:t>
@@ -2827,35 +4141,39 @@
     </p:spTree>
     <p:extLst>
       <p:ext uri="{BB962C8B-B14F-4D97-AF65-F5344CB8AC3E}">
-        <p14:creationId xmlns:p14="http://schemas.microsoft.com/office/powerpoint/2010/main" val="2209977519"/>
+        <p14:creationId xmlns:p14="http://schemas.microsoft.com/office/powerpoint/2010/main" val="2511110928"/>
       </p:ext>
     </p:extLst>
   </p:cSld>
-  <p:clrMap bg1="lt1" tx1="dk1" bg2="lt2" tx2="dk2" accent1="accent1" accent2="accent2" accent3="accent3" accent4="accent4" accent5="accent5" accent6="accent6" hlink="hlink" folHlink="folHlink"/>
+  <p:clrMap bg1="dk1" tx1="lt1" bg2="dk2" tx2="lt2" accent1="accent1" accent2="accent2" accent3="accent3" accent4="accent4" accent5="accent5" accent6="accent6" hlink="hlink" folHlink="folHlink"/>
   <p:sldLayoutIdLst>
-    <p:sldLayoutId id="2147483649" r:id="rId1"/>
-    <p:sldLayoutId id="2147483650" r:id="rId2"/>
-    <p:sldLayoutId id="2147483651" r:id="rId3"/>
-    <p:sldLayoutId id="2147483652" r:id="rId4"/>
-    <p:sldLayoutId id="2147483653" r:id="rId5"/>
-    <p:sldLayoutId id="2147483654" r:id="rId6"/>
-    <p:sldLayoutId id="2147483655" r:id="rId7"/>
-    <p:sldLayoutId id="2147483656" r:id="rId8"/>
-    <p:sldLayoutId id="2147483657" r:id="rId9"/>
-    <p:sldLayoutId id="2147483658" r:id="rId10"/>
-    <p:sldLayoutId id="2147483659" r:id="rId11"/>
+    <p:sldLayoutId id="2147483661" r:id="rId1"/>
+    <p:sldLayoutId id="2147483662" r:id="rId2"/>
+    <p:sldLayoutId id="2147483663" r:id="rId3"/>
+    <p:sldLayoutId id="2147483664" r:id="rId4"/>
+    <p:sldLayoutId id="2147483665" r:id="rId5"/>
+    <p:sldLayoutId id="2147483666" r:id="rId6"/>
+    <p:sldLayoutId id="2147483667" r:id="rId7"/>
+    <p:sldLayoutId id="2147483668" r:id="rId8"/>
+    <p:sldLayoutId id="2147483669" r:id="rId9"/>
+    <p:sldLayoutId id="2147483670" r:id="rId10"/>
+    <p:sldLayoutId id="2147483671" r:id="rId11"/>
   </p:sldLayoutIdLst>
   <p:txStyles>
     <p:titleStyle>
-      <a:lvl1pPr algn="ctr" defTabSz="457200" rtl="0" eaLnBrk="1" latinLnBrk="0" hangingPunct="1">
+      <a:lvl1pPr algn="r" defTabSz="685800" rtl="0" eaLnBrk="1" latinLnBrk="0" hangingPunct="1">
+        <a:lnSpc>
+          <a:spcPct val="90000"/>
+        </a:lnSpc>
         <a:spcBef>
           <a:spcPct val="0"/>
         </a:spcBef>
         <a:buNone/>
-        <a:defRPr sz="4400" kern="1200">
+        <a:defRPr sz="2800" b="0" i="0" kern="1200" cap="none">
           <a:solidFill>
             <a:schemeClr val="tx1"/>
           </a:solidFill>
+          <a:effectLst/>
           <a:latin typeface="+mj-lt"/>
           <a:ea typeface="+mj-ea"/>
           <a:cs typeface="+mj-cs"/>
@@ -2863,136 +4181,235 @@
       </a:lvl1pPr>
     </p:titleStyle>
     <p:bodyStyle>
-      <a:lvl1pPr marL="342900" indent="-342900" algn="l" defTabSz="457200" rtl="0" eaLnBrk="1" latinLnBrk="0" hangingPunct="1">
+      <a:lvl1pPr marL="258366" indent="-258366" algn="l" defTabSz="685800" rtl="0" eaLnBrk="1" latinLnBrk="0" hangingPunct="1">
+        <a:lnSpc>
+          <a:spcPct val="120000"/>
+        </a:lnSpc>
         <a:spcBef>
-          <a:spcPct val="20000"/>
+          <a:spcPts val="750"/>
         </a:spcBef>
-        <a:buFont typeface="Arial"/>
-        <a:buChar char="•"/>
-        <a:defRPr sz="3200" kern="1200">
+        <a:spcAft>
+          <a:spcPts val="450"/>
+        </a:spcAft>
+        <a:buClr>
+          <a:schemeClr val="accent6"/>
+        </a:buClr>
+        <a:buSzPct val="90000"/>
+        <a:buFont typeface="Wingdings" panose="05000000000000000000" pitchFamily="2" charset="2"/>
+        <a:buChar char="§"/>
+        <a:defRPr sz="1800" kern="1200">
           <a:solidFill>
             <a:schemeClr val="tx1"/>
           </a:solidFill>
+          <a:effectLst/>
           <a:latin typeface="+mn-lt"/>
           <a:ea typeface="+mn-ea"/>
           <a:cs typeface="+mn-cs"/>
         </a:defRPr>
       </a:lvl1pPr>
-      <a:lvl2pPr marL="742950" indent="-285750" algn="l" defTabSz="457200" rtl="0" eaLnBrk="1" latinLnBrk="0" hangingPunct="1">
+      <a:lvl2pPr marL="596504" indent="-253604" algn="l" defTabSz="685800" rtl="0" eaLnBrk="1" latinLnBrk="0" hangingPunct="1">
+        <a:lnSpc>
+          <a:spcPct val="120000"/>
+        </a:lnSpc>
         <a:spcBef>
-          <a:spcPct val="20000"/>
+          <a:spcPts val="375"/>
         </a:spcBef>
-        <a:buFont typeface="Arial"/>
-        <a:buChar char="–"/>
-        <a:defRPr sz="2800" kern="1200">
+        <a:spcAft>
+          <a:spcPts val="450"/>
+        </a:spcAft>
+        <a:buClr>
+          <a:schemeClr val="accent6"/>
+        </a:buClr>
+        <a:buSzPct val="90000"/>
+        <a:buFont typeface="Wingdings" panose="05000000000000000000" pitchFamily="2" charset="2"/>
+        <a:buChar char="§"/>
+        <a:defRPr sz="1600" kern="1200">
           <a:solidFill>
             <a:schemeClr val="tx1"/>
           </a:solidFill>
+          <a:effectLst/>
           <a:latin typeface="+mn-lt"/>
           <a:ea typeface="+mn-ea"/>
           <a:cs typeface="+mn-cs"/>
         </a:defRPr>
       </a:lvl2pPr>
-      <a:lvl3pPr marL="1143000" indent="-228600" algn="l" defTabSz="457200" rtl="0" eaLnBrk="1" latinLnBrk="0" hangingPunct="1">
+      <a:lvl3pPr marL="944166" indent="-258366" algn="l" defTabSz="685800" rtl="0" eaLnBrk="1" latinLnBrk="0" hangingPunct="1">
+        <a:lnSpc>
+          <a:spcPct val="120000"/>
+        </a:lnSpc>
         <a:spcBef>
-          <a:spcPct val="20000"/>
+          <a:spcPts val="375"/>
         </a:spcBef>
-        <a:buFont typeface="Arial"/>
-        <a:buChar char="•"/>
-        <a:defRPr sz="2400" kern="1200">
+        <a:spcAft>
+          <a:spcPts val="450"/>
+        </a:spcAft>
+        <a:buClr>
+          <a:schemeClr val="accent6"/>
+        </a:buClr>
+        <a:buSzPct val="90000"/>
+        <a:buFont typeface="Wingdings" panose="05000000000000000000" pitchFamily="2" charset="2"/>
+        <a:buChar char="§"/>
+        <a:defRPr sz="1400" kern="1200">
           <a:solidFill>
             <a:schemeClr val="tx1"/>
           </a:solidFill>
+          <a:effectLst/>
           <a:latin typeface="+mn-lt"/>
           <a:ea typeface="+mn-ea"/>
           <a:cs typeface="+mn-cs"/>
         </a:defRPr>
       </a:lvl3pPr>
-      <a:lvl4pPr marL="1600200" indent="-228600" algn="l" defTabSz="457200" rtl="0" eaLnBrk="1" latinLnBrk="0" hangingPunct="1">
+      <a:lvl4pPr marL="1282304" indent="-253604" algn="l" defTabSz="685800" rtl="0" eaLnBrk="1" latinLnBrk="0" hangingPunct="1">
+        <a:lnSpc>
+          <a:spcPct val="120000"/>
+        </a:lnSpc>
         <a:spcBef>
-          <a:spcPct val="20000"/>
+          <a:spcPts val="375"/>
         </a:spcBef>
-        <a:buFont typeface="Arial"/>
-        <a:buChar char="–"/>
-        <a:defRPr sz="2000" kern="1200">
+        <a:spcAft>
+          <a:spcPts val="450"/>
+        </a:spcAft>
+        <a:buClr>
+          <a:schemeClr val="accent6"/>
+        </a:buClr>
+        <a:buSzPct val="90000"/>
+        <a:buFont typeface="Wingdings" panose="05000000000000000000" pitchFamily="2" charset="2"/>
+        <a:buChar char="§"/>
+        <a:defRPr sz="1200" kern="1200">
           <a:solidFill>
             <a:schemeClr val="tx1"/>
           </a:solidFill>
+          <a:effectLst/>
           <a:latin typeface="+mn-lt"/>
           <a:ea typeface="+mn-ea"/>
           <a:cs typeface="+mn-cs"/>
         </a:defRPr>
       </a:lvl4pPr>
-      <a:lvl5pPr marL="2057400" indent="-228600" algn="l" defTabSz="457200" rtl="0" eaLnBrk="1" latinLnBrk="0" hangingPunct="1">
+      <a:lvl5pPr marL="1629966" indent="-258366" algn="l" defTabSz="685800" rtl="0" eaLnBrk="1" latinLnBrk="0" hangingPunct="1">
+        <a:lnSpc>
+          <a:spcPct val="120000"/>
+        </a:lnSpc>
         <a:spcBef>
-          <a:spcPct val="20000"/>
+          <a:spcPts val="375"/>
         </a:spcBef>
-        <a:buFont typeface="Arial"/>
-        <a:buChar char="»"/>
-        <a:defRPr sz="2000" kern="1200">
+        <a:spcAft>
+          <a:spcPts val="450"/>
+        </a:spcAft>
+        <a:buClr>
+          <a:schemeClr val="accent6"/>
+        </a:buClr>
+        <a:buSzPct val="90000"/>
+        <a:buFont typeface="Wingdings" panose="05000000000000000000" pitchFamily="2" charset="2"/>
+        <a:buChar char="§"/>
+        <a:defRPr sz="1200" kern="1200">
           <a:solidFill>
             <a:schemeClr val="tx1"/>
           </a:solidFill>
+          <a:effectLst/>
           <a:latin typeface="+mn-lt"/>
           <a:ea typeface="+mn-ea"/>
           <a:cs typeface="+mn-cs"/>
         </a:defRPr>
       </a:lvl5pPr>
-      <a:lvl6pPr marL="2514600" indent="-228600" algn="l" defTabSz="457200" rtl="0" eaLnBrk="1" latinLnBrk="0" hangingPunct="1">
+      <a:lvl6pPr marL="1975104" indent="-256032" algn="l" defTabSz="685800" rtl="0" eaLnBrk="1" latinLnBrk="0" hangingPunct="1">
+        <a:lnSpc>
+          <a:spcPct val="120000"/>
+        </a:lnSpc>
         <a:spcBef>
-          <a:spcPct val="20000"/>
+          <a:spcPts val="375"/>
         </a:spcBef>
-        <a:buFont typeface="Arial"/>
-        <a:buChar char="•"/>
-        <a:defRPr sz="2000" kern="1200">
+        <a:spcAft>
+          <a:spcPts val="450"/>
+        </a:spcAft>
+        <a:buClr>
+          <a:schemeClr val="accent6"/>
+        </a:buClr>
+        <a:buSzPct val="90000"/>
+        <a:buFont typeface="Wingdings" panose="05000000000000000000" pitchFamily="2" charset="2"/>
+        <a:buChar char="§"/>
+        <a:defRPr sz="1100" kern="1200" baseline="0">
           <a:solidFill>
             <a:schemeClr val="tx1"/>
           </a:solidFill>
+          <a:effectLst/>
           <a:latin typeface="+mn-lt"/>
           <a:ea typeface="+mn-ea"/>
           <a:cs typeface="+mn-cs"/>
         </a:defRPr>
       </a:lvl6pPr>
-      <a:lvl7pPr marL="2971800" indent="-228600" algn="l" defTabSz="457200" rtl="0" eaLnBrk="1" latinLnBrk="0" hangingPunct="1">
+      <a:lvl7pPr marL="2240280" indent="-256032" algn="l" defTabSz="685800" rtl="0" eaLnBrk="1" latinLnBrk="0" hangingPunct="1">
+        <a:lnSpc>
+          <a:spcPct val="120000"/>
+        </a:lnSpc>
         <a:spcBef>
-          <a:spcPct val="20000"/>
+          <a:spcPts val="375"/>
         </a:spcBef>
-        <a:buFont typeface="Arial"/>
-        <a:buChar char="•"/>
-        <a:defRPr sz="2000" kern="1200">
+        <a:spcAft>
+          <a:spcPts val="450"/>
+        </a:spcAft>
+        <a:buClr>
+          <a:schemeClr val="accent6"/>
+        </a:buClr>
+        <a:buSzPct val="90000"/>
+        <a:buFont typeface="Wingdings" panose="05000000000000000000" pitchFamily="2" charset="2"/>
+        <a:buChar char="§"/>
+        <a:defRPr sz="1100" kern="1200" baseline="0">
           <a:solidFill>
             <a:schemeClr val="tx1"/>
           </a:solidFill>
+          <a:effectLst/>
           <a:latin typeface="+mn-lt"/>
           <a:ea typeface="+mn-ea"/>
           <a:cs typeface="+mn-cs"/>
         </a:defRPr>
       </a:lvl7pPr>
-      <a:lvl8pPr marL="3429000" indent="-228600" algn="l" defTabSz="457200" rtl="0" eaLnBrk="1" latinLnBrk="0" hangingPunct="1">
+      <a:lvl8pPr marL="2670048" indent="-256032" algn="l" defTabSz="685800" rtl="0" eaLnBrk="1" latinLnBrk="0" hangingPunct="1">
+        <a:lnSpc>
+          <a:spcPct val="120000"/>
+        </a:lnSpc>
         <a:spcBef>
-          <a:spcPct val="20000"/>
+          <a:spcPts val="375"/>
         </a:spcBef>
-        <a:buFont typeface="Arial"/>
-        <a:buChar char="•"/>
-        <a:defRPr sz="2000" kern="1200">
+        <a:spcAft>
+          <a:spcPts val="450"/>
+        </a:spcAft>
+        <a:buClr>
+          <a:schemeClr val="accent6"/>
+        </a:buClr>
+        <a:buSzPct val="90000"/>
+        <a:buFont typeface="Wingdings" panose="05000000000000000000" pitchFamily="2" charset="2"/>
+        <a:buChar char="§"/>
+        <a:defRPr sz="1100" kern="1200" baseline="0">
           <a:solidFill>
             <a:schemeClr val="tx1"/>
           </a:solidFill>
+          <a:effectLst/>
           <a:latin typeface="+mn-lt"/>
           <a:ea typeface="+mn-ea"/>
           <a:cs typeface="+mn-cs"/>
         </a:defRPr>
       </a:lvl8pPr>
-      <a:lvl9pPr marL="3886200" indent="-228600" algn="l" defTabSz="457200" rtl="0" eaLnBrk="1" latinLnBrk="0" hangingPunct="1">
+      <a:lvl9pPr marL="3017520" indent="-256032" algn="l" defTabSz="685800" rtl="0" eaLnBrk="1" latinLnBrk="0" hangingPunct="1">
+        <a:lnSpc>
+          <a:spcPct val="120000"/>
+        </a:lnSpc>
         <a:spcBef>
-          <a:spcPct val="20000"/>
+          <a:spcPts val="375"/>
         </a:spcBef>
-        <a:buFont typeface="Arial"/>
-        <a:buChar char="•"/>
-        <a:defRPr sz="2000" kern="1200">
+        <a:spcAft>
+          <a:spcPts val="450"/>
+        </a:spcAft>
+        <a:buClr>
+          <a:schemeClr val="accent6"/>
+        </a:buClr>
+        <a:buSzPct val="90000"/>
+        <a:buFont typeface="Wingdings" panose="05000000000000000000" pitchFamily="2" charset="2"/>
+        <a:buChar char="§"/>
+        <a:defRPr sz="1100" kern="1200">
           <a:solidFill>
             <a:schemeClr val="tx1"/>
           </a:solidFill>
+          <a:effectLst/>
           <a:latin typeface="+mn-lt"/>
           <a:ea typeface="+mn-ea"/>
           <a:cs typeface="+mn-cs"/>
@@ -3003,8 +4420,8 @@
       <a:defPPr>
         <a:defRPr lang="en-US"/>
       </a:defPPr>
-      <a:lvl1pPr marL="0" algn="l" defTabSz="457200" rtl="0" eaLnBrk="1" latinLnBrk="0" hangingPunct="1">
-        <a:defRPr sz="1800" kern="1200">
+      <a:lvl1pPr marL="0" algn="l" defTabSz="685800" rtl="0" eaLnBrk="1" latinLnBrk="0" hangingPunct="1">
+        <a:defRPr sz="1350" kern="1200">
           <a:solidFill>
             <a:schemeClr val="tx1"/>
           </a:solidFill>
@@ -3013,8 +4430,8 @@
           <a:cs typeface="+mn-cs"/>
         </a:defRPr>
       </a:lvl1pPr>
-      <a:lvl2pPr marL="457200" algn="l" defTabSz="457200" rtl="0" eaLnBrk="1" latinLnBrk="0" hangingPunct="1">
-        <a:defRPr sz="1800" kern="1200">
+      <a:lvl2pPr marL="342900" algn="l" defTabSz="685800" rtl="0" eaLnBrk="1" latinLnBrk="0" hangingPunct="1">
+        <a:defRPr sz="1350" kern="1200">
           <a:solidFill>
             <a:schemeClr val="tx1"/>
           </a:solidFill>
@@ -3023,8 +4440,8 @@
           <a:cs typeface="+mn-cs"/>
         </a:defRPr>
       </a:lvl2pPr>
-      <a:lvl3pPr marL="914400" algn="l" defTabSz="457200" rtl="0" eaLnBrk="1" latinLnBrk="0" hangingPunct="1">
-        <a:defRPr sz="1800" kern="1200">
+      <a:lvl3pPr marL="685800" algn="l" defTabSz="685800" rtl="0" eaLnBrk="1" latinLnBrk="0" hangingPunct="1">
+        <a:defRPr sz="1350" kern="1200">
           <a:solidFill>
             <a:schemeClr val="tx1"/>
           </a:solidFill>
@@ -3033,8 +4450,8 @@
           <a:cs typeface="+mn-cs"/>
         </a:defRPr>
       </a:lvl3pPr>
-      <a:lvl4pPr marL="1371600" algn="l" defTabSz="457200" rtl="0" eaLnBrk="1" latinLnBrk="0" hangingPunct="1">
-        <a:defRPr sz="1800" kern="1200">
+      <a:lvl4pPr marL="1028700" algn="l" defTabSz="685800" rtl="0" eaLnBrk="1" latinLnBrk="0" hangingPunct="1">
+        <a:defRPr sz="1350" kern="1200">
           <a:solidFill>
             <a:schemeClr val="tx1"/>
           </a:solidFill>
@@ -3043,8 +4460,8 @@
           <a:cs typeface="+mn-cs"/>
         </a:defRPr>
       </a:lvl4pPr>
-      <a:lvl5pPr marL="1828800" algn="l" defTabSz="457200" rtl="0" eaLnBrk="1" latinLnBrk="0" hangingPunct="1">
-        <a:defRPr sz="1800" kern="1200">
+      <a:lvl5pPr marL="1371600" algn="l" defTabSz="685800" rtl="0" eaLnBrk="1" latinLnBrk="0" hangingPunct="1">
+        <a:defRPr sz="1350" kern="1200">
           <a:solidFill>
             <a:schemeClr val="tx1"/>
           </a:solidFill>
@@ -3053,8 +4470,8 @@
           <a:cs typeface="+mn-cs"/>
         </a:defRPr>
       </a:lvl5pPr>
-      <a:lvl6pPr marL="2286000" algn="l" defTabSz="457200" rtl="0" eaLnBrk="1" latinLnBrk="0" hangingPunct="1">
-        <a:defRPr sz="1800" kern="1200">
+      <a:lvl6pPr marL="1714500" algn="l" defTabSz="685800" rtl="0" eaLnBrk="1" latinLnBrk="0" hangingPunct="1">
+        <a:defRPr sz="1350" kern="1200">
           <a:solidFill>
             <a:schemeClr val="tx1"/>
           </a:solidFill>
@@ -3063,8 +4480,8 @@
           <a:cs typeface="+mn-cs"/>
         </a:defRPr>
       </a:lvl6pPr>
-      <a:lvl7pPr marL="2743200" algn="l" defTabSz="457200" rtl="0" eaLnBrk="1" latinLnBrk="0" hangingPunct="1">
-        <a:defRPr sz="1800" kern="1200">
+      <a:lvl7pPr marL="2057400" algn="l" defTabSz="685800" rtl="0" eaLnBrk="1" latinLnBrk="0" hangingPunct="1">
+        <a:defRPr sz="1350" kern="1200">
           <a:solidFill>
             <a:schemeClr val="tx1"/>
           </a:solidFill>
@@ -3073,8 +4490,8 @@
           <a:cs typeface="+mn-cs"/>
         </a:defRPr>
       </a:lvl7pPr>
-      <a:lvl8pPr marL="3200400" algn="l" defTabSz="457200" rtl="0" eaLnBrk="1" latinLnBrk="0" hangingPunct="1">
-        <a:defRPr sz="1800" kern="1200">
+      <a:lvl8pPr marL="2400300" algn="l" defTabSz="685800" rtl="0" eaLnBrk="1" latinLnBrk="0" hangingPunct="1">
+        <a:defRPr sz="1350" kern="1200">
           <a:solidFill>
             <a:schemeClr val="tx1"/>
           </a:solidFill>
@@ -3083,8 +4500,8 @@
           <a:cs typeface="+mn-cs"/>
         </a:defRPr>
       </a:lvl8pPr>
-      <a:lvl9pPr marL="3657600" algn="l" defTabSz="457200" rtl="0" eaLnBrk="1" latinLnBrk="0" hangingPunct="1">
-        <a:defRPr sz="1800" kern="1200">
+      <a:lvl9pPr marL="2743200" algn="l" defTabSz="685800" rtl="0" eaLnBrk="1" latinLnBrk="0" hangingPunct="1">
+        <a:defRPr sz="1350" kern="1200">
           <a:solidFill>
             <a:schemeClr val="tx1"/>
           </a:solidFill>
@@ -3099,7 +4516,7 @@
 </file>
 
 <file path=ppt/slides/slide1.xml><?xml version="1.0" encoding="utf-8"?>
-<p:sld xmlns:a="http://schemas.openxmlformats.org/drawingml/2006/main" xmlns:p="http://schemas.openxmlformats.org/presentationml/2006/main" xmlns:r="http://schemas.openxmlformats.org/officeDocument/2006/relationships">
+<p:sld xmlns:a="http://schemas.openxmlformats.org/drawingml/2006/main" xmlns:r="http://schemas.openxmlformats.org/officeDocument/2006/relationships" xmlns:p="http://schemas.openxmlformats.org/presentationml/2006/main">
   <p:cSld>
     <p:spTree>
       <p:nvGrpSpPr>
@@ -3107,7 +4524,14 @@
         <p:cNvGrpSpPr/>
         <p:nvPr/>
       </p:nvGrpSpPr>
-      <p:grpSpPr/>
+      <p:grpSpPr>
+        <a:xfrm>
+          <a:off x="0" y="0"/>
+          <a:ext cx="0" cy="0"/>
+          <a:chOff x="0" y="0"/>
+          <a:chExt cx="0" cy="0"/>
+        </a:xfrm>
+      </p:grpSpPr>
       <p:sp>
         <p:nvSpPr>
           <p:cNvPr id="2" name="Title 1"/>
@@ -3120,7 +4544,9 @@
         </p:nvSpPr>
         <p:spPr/>
         <p:txBody>
-          <a:bodyPr/>
+          <a:bodyPr>
+            <a:normAutofit fontScale="90000"/>
+          </a:bodyPr>
           <a:lstStyle/>
           <a:p>
             <a:r>
@@ -3159,7 +4585,7 @@
 </file>
 
 <file path=ppt/slides/slide10.xml><?xml version="1.0" encoding="utf-8"?>
-<p:sld xmlns:a="http://schemas.openxmlformats.org/drawingml/2006/main" xmlns:p="http://schemas.openxmlformats.org/presentationml/2006/main" xmlns:r="http://schemas.openxmlformats.org/officeDocument/2006/relationships">
+<p:sld xmlns:a="http://schemas.openxmlformats.org/drawingml/2006/main" xmlns:r="http://schemas.openxmlformats.org/officeDocument/2006/relationships" xmlns:p="http://schemas.openxmlformats.org/presentationml/2006/main">
   <p:cSld>
     <p:spTree>
       <p:nvGrpSpPr>
@@ -3167,7 +4593,14 @@
         <p:cNvGrpSpPr/>
         <p:nvPr/>
       </p:nvGrpSpPr>
-      <p:grpSpPr/>
+      <p:grpSpPr>
+        <a:xfrm>
+          <a:off x="0" y="0"/>
+          <a:ext cx="0" cy="0"/>
+          <a:chOff x="0" y="0"/>
+          <a:chExt cx="0" cy="0"/>
+        </a:xfrm>
+      </p:grpSpPr>
       <p:sp>
         <p:nvSpPr>
           <p:cNvPr id="2" name="Title 1"/>
@@ -3224,7 +4657,7 @@
 </file>
 
 <file path=ppt/slides/slide11.xml><?xml version="1.0" encoding="utf-8"?>
-<p:sld xmlns:a="http://schemas.openxmlformats.org/drawingml/2006/main" xmlns:p="http://schemas.openxmlformats.org/presentationml/2006/main" xmlns:r="http://schemas.openxmlformats.org/officeDocument/2006/relationships">
+<p:sld xmlns:a="http://schemas.openxmlformats.org/drawingml/2006/main" xmlns:r="http://schemas.openxmlformats.org/officeDocument/2006/relationships" xmlns:p="http://schemas.openxmlformats.org/presentationml/2006/main">
   <p:cSld>
     <p:spTree>
       <p:nvGrpSpPr>
@@ -3232,7 +4665,14 @@
         <p:cNvGrpSpPr/>
         <p:nvPr/>
       </p:nvGrpSpPr>
-      <p:grpSpPr/>
+      <p:grpSpPr>
+        <a:xfrm>
+          <a:off x="0" y="0"/>
+          <a:ext cx="0" cy="0"/>
+          <a:chOff x="0" y="0"/>
+          <a:chExt cx="0" cy="0"/>
+        </a:xfrm>
+      </p:grpSpPr>
       <p:sp>
         <p:nvSpPr>
           <p:cNvPr id="2" name="Title 1"/>
@@ -3289,7 +4729,7 @@
 </file>
 
 <file path=ppt/slides/slide12.xml><?xml version="1.0" encoding="utf-8"?>
-<p:sld xmlns:a="http://schemas.openxmlformats.org/drawingml/2006/main" xmlns:p="http://schemas.openxmlformats.org/presentationml/2006/main" xmlns:r="http://schemas.openxmlformats.org/officeDocument/2006/relationships">
+<p:sld xmlns:a="http://schemas.openxmlformats.org/drawingml/2006/main" xmlns:r="http://schemas.openxmlformats.org/officeDocument/2006/relationships" xmlns:p="http://schemas.openxmlformats.org/presentationml/2006/main">
   <p:cSld>
     <p:spTree>
       <p:nvGrpSpPr>
@@ -3297,7 +4737,14 @@
         <p:cNvGrpSpPr/>
         <p:nvPr/>
       </p:nvGrpSpPr>
-      <p:grpSpPr/>
+      <p:grpSpPr>
+        <a:xfrm>
+          <a:off x="0" y="0"/>
+          <a:ext cx="0" cy="0"/>
+          <a:chOff x="0" y="0"/>
+          <a:chExt cx="0" cy="0"/>
+        </a:xfrm>
+      </p:grpSpPr>
       <p:sp>
         <p:nvSpPr>
           <p:cNvPr id="2" name="Title 1"/>
@@ -3359,7 +4806,7 @@
 </file>
 
 <file path=ppt/slides/slide13.xml><?xml version="1.0" encoding="utf-8"?>
-<p:sld xmlns:a="http://schemas.openxmlformats.org/drawingml/2006/main" xmlns:p="http://schemas.openxmlformats.org/presentationml/2006/main" xmlns:r="http://schemas.openxmlformats.org/officeDocument/2006/relationships">
+<p:sld xmlns:a="http://schemas.openxmlformats.org/drawingml/2006/main" xmlns:r="http://schemas.openxmlformats.org/officeDocument/2006/relationships" xmlns:p="http://schemas.openxmlformats.org/presentationml/2006/main">
   <p:cSld>
     <p:spTree>
       <p:nvGrpSpPr>
@@ -3367,7 +4814,14 @@
         <p:cNvGrpSpPr/>
         <p:nvPr/>
       </p:nvGrpSpPr>
-      <p:grpSpPr/>
+      <p:grpSpPr>
+        <a:xfrm>
+          <a:off x="0" y="0"/>
+          <a:ext cx="0" cy="0"/>
+          <a:chOff x="0" y="0"/>
+          <a:chExt cx="0" cy="0"/>
+        </a:xfrm>
+      </p:grpSpPr>
       <p:sp>
         <p:nvSpPr>
           <p:cNvPr id="2" name="Title 1"/>
@@ -3429,7 +4883,7 @@
 </file>
 
 <file path=ppt/slides/slide14.xml><?xml version="1.0" encoding="utf-8"?>
-<p:sld xmlns:a="http://schemas.openxmlformats.org/drawingml/2006/main" xmlns:p="http://schemas.openxmlformats.org/presentationml/2006/main" xmlns:r="http://schemas.openxmlformats.org/officeDocument/2006/relationships">
+<p:sld xmlns:a="http://schemas.openxmlformats.org/drawingml/2006/main" xmlns:r="http://schemas.openxmlformats.org/officeDocument/2006/relationships" xmlns:p="http://schemas.openxmlformats.org/presentationml/2006/main">
   <p:cSld>
     <p:spTree>
       <p:nvGrpSpPr>
@@ -3437,7 +4891,14 @@
         <p:cNvGrpSpPr/>
         <p:nvPr/>
       </p:nvGrpSpPr>
-      <p:grpSpPr/>
+      <p:grpSpPr>
+        <a:xfrm>
+          <a:off x="0" y="0"/>
+          <a:ext cx="0" cy="0"/>
+          <a:chOff x="0" y="0"/>
+          <a:chExt cx="0" cy="0"/>
+        </a:xfrm>
+      </p:grpSpPr>
       <p:sp>
         <p:nvSpPr>
           <p:cNvPr id="2" name="Title 1"/>
@@ -3494,7 +4955,7 @@
 </file>
 
 <file path=ppt/slides/slide15.xml><?xml version="1.0" encoding="utf-8"?>
-<p:sld xmlns:a="http://schemas.openxmlformats.org/drawingml/2006/main" xmlns:p="http://schemas.openxmlformats.org/presentationml/2006/main" xmlns:r="http://schemas.openxmlformats.org/officeDocument/2006/relationships">
+<p:sld xmlns:a="http://schemas.openxmlformats.org/drawingml/2006/main" xmlns:r="http://schemas.openxmlformats.org/officeDocument/2006/relationships" xmlns:p="http://schemas.openxmlformats.org/presentationml/2006/main">
   <p:cSld>
     <p:spTree>
       <p:nvGrpSpPr>
@@ -3502,7 +4963,14 @@
         <p:cNvGrpSpPr/>
         <p:nvPr/>
       </p:nvGrpSpPr>
-      <p:grpSpPr/>
+      <p:grpSpPr>
+        <a:xfrm>
+          <a:off x="0" y="0"/>
+          <a:ext cx="0" cy="0"/>
+          <a:chOff x="0" y="0"/>
+          <a:chExt cx="0" cy="0"/>
+        </a:xfrm>
+      </p:grpSpPr>
       <p:sp>
         <p:nvSpPr>
           <p:cNvPr id="2" name="Title 1"/>
@@ -3564,7 +5032,7 @@
 </file>
 
 <file path=ppt/slides/slide16.xml><?xml version="1.0" encoding="utf-8"?>
-<p:sld xmlns:a="http://schemas.openxmlformats.org/drawingml/2006/main" xmlns:p="http://schemas.openxmlformats.org/presentationml/2006/main" xmlns:r="http://schemas.openxmlformats.org/officeDocument/2006/relationships">
+<p:sld xmlns:a="http://schemas.openxmlformats.org/drawingml/2006/main" xmlns:r="http://schemas.openxmlformats.org/officeDocument/2006/relationships" xmlns:p="http://schemas.openxmlformats.org/presentationml/2006/main">
   <p:cSld>
     <p:spTree>
       <p:nvGrpSpPr>
@@ -3572,7 +5040,14 @@
         <p:cNvGrpSpPr/>
         <p:nvPr/>
       </p:nvGrpSpPr>
-      <p:grpSpPr/>
+      <p:grpSpPr>
+        <a:xfrm>
+          <a:off x="0" y="0"/>
+          <a:ext cx="0" cy="0"/>
+          <a:chOff x="0" y="0"/>
+          <a:chExt cx="0" cy="0"/>
+        </a:xfrm>
+      </p:grpSpPr>
       <p:sp>
         <p:nvSpPr>
           <p:cNvPr id="2" name="Title 1"/>
@@ -3629,7 +5104,7 @@
 </file>
 
 <file path=ppt/slides/slide17.xml><?xml version="1.0" encoding="utf-8"?>
-<p:sld xmlns:a="http://schemas.openxmlformats.org/drawingml/2006/main" xmlns:p="http://schemas.openxmlformats.org/presentationml/2006/main" xmlns:r="http://schemas.openxmlformats.org/officeDocument/2006/relationships">
+<p:sld xmlns:a="http://schemas.openxmlformats.org/drawingml/2006/main" xmlns:r="http://schemas.openxmlformats.org/officeDocument/2006/relationships" xmlns:p="http://schemas.openxmlformats.org/presentationml/2006/main">
   <p:cSld>
     <p:spTree>
       <p:nvGrpSpPr>
@@ -3637,7 +5112,14 @@
         <p:cNvGrpSpPr/>
         <p:nvPr/>
       </p:nvGrpSpPr>
-      <p:grpSpPr/>
+      <p:grpSpPr>
+        <a:xfrm>
+          <a:off x="0" y="0"/>
+          <a:ext cx="0" cy="0"/>
+          <a:chOff x="0" y="0"/>
+          <a:chExt cx="0" cy="0"/>
+        </a:xfrm>
+      </p:grpSpPr>
       <p:sp>
         <p:nvSpPr>
           <p:cNvPr id="2" name="Title 1"/>
@@ -3699,7 +5181,7 @@
 </file>
 
 <file path=ppt/slides/slide18.xml><?xml version="1.0" encoding="utf-8"?>
-<p:sld xmlns:a="http://schemas.openxmlformats.org/drawingml/2006/main" xmlns:p="http://schemas.openxmlformats.org/presentationml/2006/main" xmlns:r="http://schemas.openxmlformats.org/officeDocument/2006/relationships">
+<p:sld xmlns:a="http://schemas.openxmlformats.org/drawingml/2006/main" xmlns:r="http://schemas.openxmlformats.org/officeDocument/2006/relationships" xmlns:p="http://schemas.openxmlformats.org/presentationml/2006/main">
   <p:cSld>
     <p:spTree>
       <p:nvGrpSpPr>
@@ -3707,7 +5189,14 @@
         <p:cNvGrpSpPr/>
         <p:nvPr/>
       </p:nvGrpSpPr>
-      <p:grpSpPr/>
+      <p:grpSpPr>
+        <a:xfrm>
+          <a:off x="0" y="0"/>
+          <a:ext cx="0" cy="0"/>
+          <a:chOff x="0" y="0"/>
+          <a:chExt cx="0" cy="0"/>
+        </a:xfrm>
+      </p:grpSpPr>
       <p:sp>
         <p:nvSpPr>
           <p:cNvPr id="2" name="Title 1"/>
@@ -3769,7 +5258,7 @@
 </file>
 
 <file path=ppt/slides/slide19.xml><?xml version="1.0" encoding="utf-8"?>
-<p:sld xmlns:a="http://schemas.openxmlformats.org/drawingml/2006/main" xmlns:p="http://schemas.openxmlformats.org/presentationml/2006/main" xmlns:r="http://schemas.openxmlformats.org/officeDocument/2006/relationships">
+<p:sld xmlns:a="http://schemas.openxmlformats.org/drawingml/2006/main" xmlns:r="http://schemas.openxmlformats.org/officeDocument/2006/relationships" xmlns:p="http://schemas.openxmlformats.org/presentationml/2006/main">
   <p:cSld>
     <p:spTree>
       <p:nvGrpSpPr>
@@ -3777,7 +5266,14 @@
         <p:cNvGrpSpPr/>
         <p:nvPr/>
       </p:nvGrpSpPr>
-      <p:grpSpPr/>
+      <p:grpSpPr>
+        <a:xfrm>
+          <a:off x="0" y="0"/>
+          <a:ext cx="0" cy="0"/>
+          <a:chOff x="0" y="0"/>
+          <a:chExt cx="0" cy="0"/>
+        </a:xfrm>
+      </p:grpSpPr>
       <p:sp>
         <p:nvSpPr>
           <p:cNvPr id="2" name="Title 1"/>
@@ -3839,7 +5335,7 @@
 </file>
 
 <file path=ppt/slides/slide2.xml><?xml version="1.0" encoding="utf-8"?>
-<p:sld xmlns:a="http://schemas.openxmlformats.org/drawingml/2006/main" xmlns:p="http://schemas.openxmlformats.org/presentationml/2006/main" xmlns:r="http://schemas.openxmlformats.org/officeDocument/2006/relationships">
+<p:sld xmlns:a="http://schemas.openxmlformats.org/drawingml/2006/main" xmlns:r="http://schemas.openxmlformats.org/officeDocument/2006/relationships" xmlns:p="http://schemas.openxmlformats.org/presentationml/2006/main">
   <p:cSld>
     <p:spTree>
       <p:nvGrpSpPr>
@@ -3847,7 +5343,14 @@
         <p:cNvGrpSpPr/>
         <p:nvPr/>
       </p:nvGrpSpPr>
-      <p:grpSpPr/>
+      <p:grpSpPr>
+        <a:xfrm>
+          <a:off x="0" y="0"/>
+          <a:ext cx="0" cy="0"/>
+          <a:chOff x="0" y="0"/>
+          <a:chExt cx="0" cy="0"/>
+        </a:xfrm>
+      </p:grpSpPr>
       <p:sp>
         <p:nvSpPr>
           <p:cNvPr id="2" name="Title 1"/>
@@ -3909,7 +5412,7 @@
 </file>
 
 <file path=ppt/slides/slide20.xml><?xml version="1.0" encoding="utf-8"?>
-<p:sld xmlns:a="http://schemas.openxmlformats.org/drawingml/2006/main" xmlns:p="http://schemas.openxmlformats.org/presentationml/2006/main" xmlns:r="http://schemas.openxmlformats.org/officeDocument/2006/relationships">
+<p:sld xmlns:a="http://schemas.openxmlformats.org/drawingml/2006/main" xmlns:r="http://schemas.openxmlformats.org/officeDocument/2006/relationships" xmlns:p="http://schemas.openxmlformats.org/presentationml/2006/main">
   <p:cSld>
     <p:spTree>
       <p:nvGrpSpPr>
@@ -3917,7 +5420,14 @@
         <p:cNvGrpSpPr/>
         <p:nvPr/>
       </p:nvGrpSpPr>
-      <p:grpSpPr/>
+      <p:grpSpPr>
+        <a:xfrm>
+          <a:off x="0" y="0"/>
+          <a:ext cx="0" cy="0"/>
+          <a:chOff x="0" y="0"/>
+          <a:chExt cx="0" cy="0"/>
+        </a:xfrm>
+      </p:grpSpPr>
       <p:sp>
         <p:nvSpPr>
           <p:cNvPr id="2" name="Title 1"/>
@@ -3979,7 +5489,7 @@
 </file>
 
 <file path=ppt/slides/slide21.xml><?xml version="1.0" encoding="utf-8"?>
-<p:sld xmlns:a="http://schemas.openxmlformats.org/drawingml/2006/main" xmlns:p="http://schemas.openxmlformats.org/presentationml/2006/main" xmlns:r="http://schemas.openxmlformats.org/officeDocument/2006/relationships">
+<p:sld xmlns:a="http://schemas.openxmlformats.org/drawingml/2006/main" xmlns:r="http://schemas.openxmlformats.org/officeDocument/2006/relationships" xmlns:p="http://schemas.openxmlformats.org/presentationml/2006/main">
   <p:cSld>
     <p:spTree>
       <p:nvGrpSpPr>
@@ -3987,7 +5497,14 @@
         <p:cNvGrpSpPr/>
         <p:nvPr/>
       </p:nvGrpSpPr>
-      <p:grpSpPr/>
+      <p:grpSpPr>
+        <a:xfrm>
+          <a:off x="0" y="0"/>
+          <a:ext cx="0" cy="0"/>
+          <a:chOff x="0" y="0"/>
+          <a:chExt cx="0" cy="0"/>
+        </a:xfrm>
+      </p:grpSpPr>
       <p:sp>
         <p:nvSpPr>
           <p:cNvPr id="2" name="Title 1"/>
@@ -4054,7 +5571,7 @@
 </file>
 
 <file path=ppt/slides/slide3.xml><?xml version="1.0" encoding="utf-8"?>
-<p:sld xmlns:a="http://schemas.openxmlformats.org/drawingml/2006/main" xmlns:p="http://schemas.openxmlformats.org/presentationml/2006/main" xmlns:r="http://schemas.openxmlformats.org/officeDocument/2006/relationships">
+<p:sld xmlns:a="http://schemas.openxmlformats.org/drawingml/2006/main" xmlns:r="http://schemas.openxmlformats.org/officeDocument/2006/relationships" xmlns:p="http://schemas.openxmlformats.org/presentationml/2006/main">
   <p:cSld>
     <p:spTree>
       <p:nvGrpSpPr>
@@ -4062,7 +5579,14 @@
         <p:cNvGrpSpPr/>
         <p:nvPr/>
       </p:nvGrpSpPr>
-      <p:grpSpPr/>
+      <p:grpSpPr>
+        <a:xfrm>
+          <a:off x="0" y="0"/>
+          <a:ext cx="0" cy="0"/>
+          <a:chOff x="0" y="0"/>
+          <a:chExt cx="0" cy="0"/>
+        </a:xfrm>
+      </p:grpSpPr>
       <p:sp>
         <p:nvSpPr>
           <p:cNvPr id="2" name="Title 1"/>
@@ -4119,7 +5643,7 @@
 </file>
 
 <file path=ppt/slides/slide4.xml><?xml version="1.0" encoding="utf-8"?>
-<p:sld xmlns:a="http://schemas.openxmlformats.org/drawingml/2006/main" xmlns:p="http://schemas.openxmlformats.org/presentationml/2006/main" xmlns:r="http://schemas.openxmlformats.org/officeDocument/2006/relationships">
+<p:sld xmlns:a="http://schemas.openxmlformats.org/drawingml/2006/main" xmlns:r="http://schemas.openxmlformats.org/officeDocument/2006/relationships" xmlns:p="http://schemas.openxmlformats.org/presentationml/2006/main">
   <p:cSld>
     <p:spTree>
       <p:nvGrpSpPr>
@@ -4127,7 +5651,14 @@
         <p:cNvGrpSpPr/>
         <p:nvPr/>
       </p:nvGrpSpPr>
-      <p:grpSpPr/>
+      <p:grpSpPr>
+        <a:xfrm>
+          <a:off x="0" y="0"/>
+          <a:ext cx="0" cy="0"/>
+          <a:chOff x="0" y="0"/>
+          <a:chExt cx="0" cy="0"/>
+        </a:xfrm>
+      </p:grpSpPr>
       <p:sp>
         <p:nvSpPr>
           <p:cNvPr id="2" name="Title 1"/>
@@ -4189,7 +5720,7 @@
 </file>
 
 <file path=ppt/slides/slide5.xml><?xml version="1.0" encoding="utf-8"?>
-<p:sld xmlns:a="http://schemas.openxmlformats.org/drawingml/2006/main" xmlns:p="http://schemas.openxmlformats.org/presentationml/2006/main" xmlns:r="http://schemas.openxmlformats.org/officeDocument/2006/relationships">
+<p:sld xmlns:a="http://schemas.openxmlformats.org/drawingml/2006/main" xmlns:r="http://schemas.openxmlformats.org/officeDocument/2006/relationships" xmlns:p="http://schemas.openxmlformats.org/presentationml/2006/main">
   <p:cSld>
     <p:spTree>
       <p:nvGrpSpPr>
@@ -4197,7 +5728,14 @@
         <p:cNvGrpSpPr/>
         <p:nvPr/>
       </p:nvGrpSpPr>
-      <p:grpSpPr/>
+      <p:grpSpPr>
+        <a:xfrm>
+          <a:off x="0" y="0"/>
+          <a:ext cx="0" cy="0"/>
+          <a:chOff x="0" y="0"/>
+          <a:chExt cx="0" cy="0"/>
+        </a:xfrm>
+      </p:grpSpPr>
       <p:sp>
         <p:nvSpPr>
           <p:cNvPr id="2" name="Title 1"/>
@@ -4259,7 +5797,7 @@
 </file>
 
 <file path=ppt/slides/slide6.xml><?xml version="1.0" encoding="utf-8"?>
-<p:sld xmlns:a="http://schemas.openxmlformats.org/drawingml/2006/main" xmlns:p="http://schemas.openxmlformats.org/presentationml/2006/main" xmlns:r="http://schemas.openxmlformats.org/officeDocument/2006/relationships">
+<p:sld xmlns:a="http://schemas.openxmlformats.org/drawingml/2006/main" xmlns:r="http://schemas.openxmlformats.org/officeDocument/2006/relationships" xmlns:p="http://schemas.openxmlformats.org/presentationml/2006/main">
   <p:cSld>
     <p:spTree>
       <p:nvGrpSpPr>
@@ -4267,7 +5805,14 @@
         <p:cNvGrpSpPr/>
         <p:nvPr/>
       </p:nvGrpSpPr>
-      <p:grpSpPr/>
+      <p:grpSpPr>
+        <a:xfrm>
+          <a:off x="0" y="0"/>
+          <a:ext cx="0" cy="0"/>
+          <a:chOff x="0" y="0"/>
+          <a:chExt cx="0" cy="0"/>
+        </a:xfrm>
+      </p:grpSpPr>
       <p:sp>
         <p:nvSpPr>
           <p:cNvPr id="2" name="Title 1"/>
@@ -4329,7 +5874,7 @@
 </file>
 
 <file path=ppt/slides/slide7.xml><?xml version="1.0" encoding="utf-8"?>
-<p:sld xmlns:a="http://schemas.openxmlformats.org/drawingml/2006/main" xmlns:p="http://schemas.openxmlformats.org/presentationml/2006/main" xmlns:r="http://schemas.openxmlformats.org/officeDocument/2006/relationships">
+<p:sld xmlns:a="http://schemas.openxmlformats.org/drawingml/2006/main" xmlns:r="http://schemas.openxmlformats.org/officeDocument/2006/relationships" xmlns:p="http://schemas.openxmlformats.org/presentationml/2006/main">
   <p:cSld>
     <p:spTree>
       <p:nvGrpSpPr>
@@ -4337,7 +5882,14 @@
         <p:cNvGrpSpPr/>
         <p:nvPr/>
       </p:nvGrpSpPr>
-      <p:grpSpPr/>
+      <p:grpSpPr>
+        <a:xfrm>
+          <a:off x="0" y="0"/>
+          <a:ext cx="0" cy="0"/>
+          <a:chOff x="0" y="0"/>
+          <a:chExt cx="0" cy="0"/>
+        </a:xfrm>
+      </p:grpSpPr>
       <p:sp>
         <p:nvSpPr>
           <p:cNvPr id="2" name="Title 1"/>
@@ -4399,7 +5951,7 @@
 </file>
 
 <file path=ppt/slides/slide8.xml><?xml version="1.0" encoding="utf-8"?>
-<p:sld xmlns:a="http://schemas.openxmlformats.org/drawingml/2006/main" xmlns:p="http://schemas.openxmlformats.org/presentationml/2006/main" xmlns:r="http://schemas.openxmlformats.org/officeDocument/2006/relationships">
+<p:sld xmlns:a="http://schemas.openxmlformats.org/drawingml/2006/main" xmlns:r="http://schemas.openxmlformats.org/officeDocument/2006/relationships" xmlns:p="http://schemas.openxmlformats.org/presentationml/2006/main">
   <p:cSld>
     <p:spTree>
       <p:nvGrpSpPr>
@@ -4407,7 +5959,14 @@
         <p:cNvGrpSpPr/>
         <p:nvPr/>
       </p:nvGrpSpPr>
-      <p:grpSpPr/>
+      <p:grpSpPr>
+        <a:xfrm>
+          <a:off x="0" y="0"/>
+          <a:ext cx="0" cy="0"/>
+          <a:chOff x="0" y="0"/>
+          <a:chExt cx="0" cy="0"/>
+        </a:xfrm>
+      </p:grpSpPr>
       <p:sp>
         <p:nvSpPr>
           <p:cNvPr id="2" name="Title 1"/>
@@ -4469,7 +6028,7 @@
 </file>
 
 <file path=ppt/slides/slide9.xml><?xml version="1.0" encoding="utf-8"?>
-<p:sld xmlns:a="http://schemas.openxmlformats.org/drawingml/2006/main" xmlns:p="http://schemas.openxmlformats.org/presentationml/2006/main" xmlns:r="http://schemas.openxmlformats.org/officeDocument/2006/relationships">
+<p:sld xmlns:a="http://schemas.openxmlformats.org/drawingml/2006/main" xmlns:r="http://schemas.openxmlformats.org/officeDocument/2006/relationships" xmlns:p="http://schemas.openxmlformats.org/presentationml/2006/main">
   <p:cSld>
     <p:spTree>
       <p:nvGrpSpPr>
@@ -4477,7 +6036,14 @@
         <p:cNvGrpSpPr/>
         <p:nvPr/>
       </p:nvGrpSpPr>
-      <p:grpSpPr/>
+      <p:grpSpPr>
+        <a:xfrm>
+          <a:off x="0" y="0"/>
+          <a:ext cx="0" cy="0"/>
+          <a:chOff x="0" y="0"/>
+          <a:chExt cx="0" cy="0"/>
+        </a:xfrm>
+      </p:grpSpPr>
       <p:sp>
         <p:nvSpPr>
           <p:cNvPr id="2" name="Title 1"/>
@@ -4539,9 +6105,9 @@
 </file>
 
 <file path=ppt/theme/theme1.xml><?xml version="1.0" encoding="utf-8"?>
-<a:theme xmlns:a="http://schemas.openxmlformats.org/drawingml/2006/main" name="Office Theme">
+<a:theme xmlns:a="http://schemas.openxmlformats.org/drawingml/2006/main" name="Madison">
   <a:themeElements>
-    <a:clrScheme name="Office">
+    <a:clrScheme name="Madison">
       <a:dk1>
         <a:sysClr val="windowText" lastClr="000000"/>
       </a:dk1>
@@ -4549,39 +6115,39 @@
         <a:sysClr val="window" lastClr="FFFFFF"/>
       </a:lt1>
       <a:dk2>
-        <a:srgbClr val="1F497D"/>
+        <a:srgbClr val="1F2D29"/>
       </a:dk2>
       <a:lt2>
-        <a:srgbClr val="EEECE1"/>
+        <a:srgbClr val="C5FAEB"/>
       </a:lt2>
       <a:accent1>
-        <a:srgbClr val="4F81BD"/>
+        <a:srgbClr val="A1D68B"/>
       </a:accent1>
       <a:accent2>
-        <a:srgbClr val="C0504D"/>
+        <a:srgbClr val="5EC795"/>
       </a:accent2>
       <a:accent3>
-        <a:srgbClr val="9BBB59"/>
+        <a:srgbClr val="4DADCF"/>
       </a:accent3>
       <a:accent4>
-        <a:srgbClr val="8064A2"/>
+        <a:srgbClr val="CDB756"/>
       </a:accent4>
       <a:accent5>
-        <a:srgbClr val="4BACC6"/>
+        <a:srgbClr val="E29C36"/>
       </a:accent5>
       <a:accent6>
-        <a:srgbClr val="F79646"/>
+        <a:srgbClr val="8EC0C1"/>
       </a:accent6>
       <a:hlink>
-        <a:srgbClr val="0000FF"/>
+        <a:srgbClr val="6D9D9B"/>
       </a:hlink>
       <a:folHlink>
-        <a:srgbClr val="800080"/>
+        <a:srgbClr val="6D8583"/>
       </a:folHlink>
     </a:clrScheme>
-    <a:fontScheme name="Office">
+    <a:fontScheme name="Madison">
       <a:majorFont>
-        <a:latin typeface="Calibri"/>
+        <a:latin typeface="Arial" panose="020B0604020202020204"/>
         <a:ea typeface=""/>
         <a:cs typeface=""/>
         <a:font script="Jpan" typeface="ＭＳ Ｐゴシック"/>
@@ -4616,7 +6182,7 @@
         <a:font script="Geor" typeface="Sylfaen"/>
       </a:majorFont>
       <a:minorFont>
-        <a:latin typeface="Calibri"/>
+        <a:latin typeface="Arial" panose="020B0604020202020204"/>
         <a:ea typeface=""/>
         <a:cs typeface=""/>
         <a:font script="Jpan" typeface="ＭＳ Ｐゴシック"/>
@@ -4651,7 +6217,7 @@
         <a:font script="Geor" typeface="Sylfaen"/>
       </a:minorFont>
     </a:fontScheme>
-    <a:fmtScheme name="Office">
+    <a:fmtScheme name="Madison">
       <a:fillStyleLst>
         <a:solidFill>
           <a:schemeClr val="phClr"/>
@@ -4660,62 +6226,64 @@
           <a:gsLst>
             <a:gs pos="0">
               <a:schemeClr val="phClr">
-                <a:tint val="50000"/>
-                <a:satMod val="300000"/>
-              </a:schemeClr>
-            </a:gs>
-            <a:gs pos="35000">
-              <a:schemeClr val="phClr">
-                <a:tint val="37000"/>
-                <a:satMod val="300000"/>
+                <a:tint val="48000"/>
+                <a:alpha val="88000"/>
+                <a:satMod val="105000"/>
+                <a:lumMod val="110000"/>
               </a:schemeClr>
             </a:gs>
             <a:gs pos="100000">
               <a:schemeClr val="phClr">
-                <a:tint val="15000"/>
-                <a:satMod val="350000"/>
+                <a:tint val="78000"/>
+                <a:alpha val="92000"/>
+                <a:satMod val="109000"/>
+                <a:lumMod val="100000"/>
               </a:schemeClr>
             </a:gs>
           </a:gsLst>
-          <a:lin ang="16200000" scaled="1"/>
+          <a:lin ang="5400000" scaled="0"/>
         </a:gradFill>
         <a:gradFill rotWithShape="1">
           <a:gsLst>
             <a:gs pos="0">
               <a:schemeClr val="phClr">
-                <a:tint val="100000"/>
-                <a:shade val="100000"/>
+                <a:tint val="98000"/>
+                <a:satMod val="110000"/>
+                <a:lumMod val="104000"/>
+              </a:schemeClr>
+            </a:gs>
+            <a:gs pos="69000">
+              <a:schemeClr val="phClr">
+                <a:shade val="84000"/>
                 <a:satMod val="130000"/>
+                <a:lumMod val="92000"/>
               </a:schemeClr>
             </a:gs>
             <a:gs pos="100000">
               <a:schemeClr val="phClr">
-                <a:tint val="50000"/>
-                <a:shade val="100000"/>
-                <a:satMod val="350000"/>
+                <a:shade val="76000"/>
+                <a:satMod val="130000"/>
+                <a:lumMod val="88000"/>
               </a:schemeClr>
             </a:gs>
           </a:gsLst>
-          <a:lin ang="16200000" scaled="0"/>
+          <a:lin ang="5400000" scaled="0"/>
         </a:gradFill>
       </a:fillStyleLst>
       <a:lnStyleLst>
         <a:ln w="9525" cap="flat" cmpd="sng" algn="ctr">
           <a:solidFill>
-            <a:schemeClr val="phClr">
-              <a:shade val="95000"/>
-              <a:satMod val="105000"/>
-            </a:schemeClr>
+            <a:schemeClr val="phClr"/>
           </a:solidFill>
           <a:prstDash val="solid"/>
         </a:ln>
-        <a:ln w="25400" cap="flat" cmpd="sng" algn="ctr">
+        <a:ln w="15875" cap="flat" cmpd="sng" algn="ctr">
           <a:solidFill>
             <a:schemeClr val="phClr"/>
           </a:solidFill>
           <a:prstDash val="solid"/>
         </a:ln>
-        <a:ln w="38100" cap="flat" cmpd="sng" algn="ctr">
+        <a:ln w="22225" cap="flat" cmpd="sng" algn="ctr">
           <a:solidFill>
             <a:schemeClr val="phClr"/>
           </a:solidFill>
@@ -4724,136 +6292,35 @@
       </a:lnStyleLst>
       <a:effectStyleLst>
         <a:effectStyle>
-          <a:effectLst>
-            <a:outerShdw blurRad="40000" dist="20000" dir="5400000" rotWithShape="0">
-              <a:srgbClr val="000000">
-                <a:alpha val="38000"/>
-              </a:srgbClr>
-            </a:outerShdw>
-          </a:effectLst>
+          <a:effectLst/>
         </a:effectStyle>
         <a:effectStyle>
-          <a:effectLst>
-            <a:outerShdw blurRad="40000" dist="23000" dir="5400000" rotWithShape="0">
-              <a:srgbClr val="000000">
-                <a:alpha val="35000"/>
-              </a:srgbClr>
-            </a:outerShdw>
-          </a:effectLst>
+          <a:effectLst/>
         </a:effectStyle>
         <a:effectStyle>
-          <a:effectLst>
-            <a:outerShdw blurRad="40000" dist="23000" dir="5400000" rotWithShape="0">
-              <a:srgbClr val="000000">
-                <a:alpha val="35000"/>
-              </a:srgbClr>
-            </a:outerShdw>
-          </a:effectLst>
-          <a:scene3d>
-            <a:camera prst="orthographicFront">
-              <a:rot lat="0" lon="0" rev="0"/>
-            </a:camera>
-            <a:lightRig rig="threePt" dir="t">
-              <a:rot lat="0" lon="0" rev="1200000"/>
-            </a:lightRig>
-          </a:scene3d>
-          <a:sp3d>
-            <a:bevelT w="63500" h="25400"/>
-          </a:sp3d>
+          <a:effectLst/>
         </a:effectStyle>
       </a:effectStyleLst>
       <a:bgFillStyleLst>
         <a:solidFill>
           <a:schemeClr val="phClr"/>
         </a:solidFill>
-        <a:gradFill rotWithShape="1">
-          <a:gsLst>
-            <a:gs pos="0">
-              <a:schemeClr val="phClr">
-                <a:tint val="40000"/>
-                <a:satMod val="350000"/>
-              </a:schemeClr>
-            </a:gs>
-            <a:gs pos="40000">
-              <a:schemeClr val="phClr">
-                <a:tint val="45000"/>
-                <a:shade val="99000"/>
-                <a:satMod val="350000"/>
-              </a:schemeClr>
-            </a:gs>
-            <a:gs pos="100000">
-              <a:schemeClr val="phClr">
-                <a:shade val="20000"/>
-                <a:satMod val="255000"/>
-              </a:schemeClr>
-            </a:gs>
-          </a:gsLst>
-          <a:path path="circle">
-            <a:fillToRect l="50000" t="-80000" r="50000" b="180000"/>
-          </a:path>
-        </a:gradFill>
-        <a:gradFill rotWithShape="1">
-          <a:gsLst>
-            <a:gs pos="0">
-              <a:schemeClr val="phClr">
-                <a:tint val="80000"/>
-                <a:satMod val="300000"/>
-              </a:schemeClr>
-            </a:gs>
-            <a:gs pos="100000">
-              <a:schemeClr val="phClr">
-                <a:shade val="30000"/>
-                <a:satMod val="200000"/>
-              </a:schemeClr>
-            </a:gs>
-          </a:gsLst>
-          <a:path path="circle">
-            <a:fillToRect l="50000" t="50000" r="50000" b="50000"/>
-          </a:path>
-        </a:gradFill>
+        <a:solidFill>
+          <a:schemeClr val="phClr"/>
+        </a:solidFill>
+        <a:blipFill rotWithShape="1">
+          <a:blip xmlns:r="http://schemas.openxmlformats.org/officeDocument/2006/relationships" r:embed="rId1"/>
+          <a:stretch/>
+        </a:blipFill>
       </a:bgFillStyleLst>
     </a:fmtScheme>
   </a:themeElements>
-  <a:objectDefaults>
-    <a:spDef>
-      <a:spPr/>
-      <a:bodyPr/>
-      <a:lstStyle/>
-      <a:style>
-        <a:lnRef idx="1">
-          <a:schemeClr val="accent1"/>
-        </a:lnRef>
-        <a:fillRef idx="3">
-          <a:schemeClr val="accent1"/>
-        </a:fillRef>
-        <a:effectRef idx="2">
-          <a:schemeClr val="accent1"/>
-        </a:effectRef>
-        <a:fontRef idx="minor">
-          <a:schemeClr val="lt1"/>
-        </a:fontRef>
-      </a:style>
-    </a:spDef>
-    <a:lnDef>
-      <a:spPr/>
-      <a:bodyPr/>
-      <a:lstStyle/>
-      <a:style>
-        <a:lnRef idx="2">
-          <a:schemeClr val="accent1"/>
-        </a:lnRef>
-        <a:fillRef idx="0">
-          <a:schemeClr val="accent1"/>
-        </a:fillRef>
-        <a:effectRef idx="1">
-          <a:schemeClr val="accent1"/>
-        </a:effectRef>
-        <a:fontRef idx="minor">
-          <a:schemeClr val="tx1"/>
-        </a:fontRef>
-      </a:style>
-    </a:lnDef>
-  </a:objectDefaults>
+  <a:objectDefaults/>
   <a:extraClrSchemeLst/>
+  <a:extLst>
+    <a:ext uri="{05A4C25C-085E-4340-85A3-A5531E510DB2}">
+      <thm15:themeFamily xmlns:thm15="http://schemas.microsoft.com/office/thememl/2012/main" name="Madison" id="{025CB5FB-2DD3-45EE-B6F0-CC461540EB19}" vid="{6AC10936-2DFC-4054-9ADF-B5E2C5F86190}"/>
+    </a:ext>
+  </a:extLst>
 </a:theme>
 </file>